--- a/Проект_Эхо_презентация.pptx
+++ b/Проект_Эхо_презентация.pptx
@@ -16,9 +16,10 @@
     <p:sldId id="264" r:id="rId10"/>
     <p:sldId id="265" r:id="rId11"/>
     <p:sldId id="266" r:id="rId12"/>
+    <p:sldId id="267" r:id="rId13"/>
   </p:sldIdLst>
   <p:notesMasterIdLst>
-    <p:notesMasterId r:id="rId13"/>
+    <p:notesMasterId r:id="rId14"/>
   </p:notesMasterIdLst>
   <p:sldSz cx="9144000" cy="5143500"/>
   <p:notesSz cx="5143500" cy="9144000"/>
@@ -512,7 +513,7 @@
           <a:p>
             <a:r>
               <a:rPr lang="en-US" dirty="0"/>
-              <a:t>Приложение уже опубликовано — ссылку можно открыть прямо сейчас с телефона.</a:t>
+              <a:t>Приложение уже опубликовано. Ссылку можно открыть прямо сейчас с телефона.</a:t>
             </a:r>
             <a:endParaRPr lang="en-US" dirty="0"/>
           </a:p>
@@ -712,6 +713,94 @@
             <a:fld id="{F7021451-1387-4CA6-816F-3879F97B5CBC}" type="slidenum">
               <a:rPr lang="en-US"/>
               <a:t>11</a:t>
+            </a:fld>
+            <a:endParaRPr lang="en-US"/>
+          </a:p>
+        </p:txBody>
+      </p:sp>
+    </p:spTree>
+    <p:extLst>
+      <p:ext uri="{BB962C8B-B14F-4D97-AF65-F5344CB8AC3E}">
+        <p14:creationId xmlns:p14="http://schemas.microsoft.com/office/powerpoint/2010/main" val="1024086991"/>
+      </p:ext>
+    </p:extLst>
+  </p:cSld>
+  <p:clrMapOvr>
+    <a:masterClrMapping/>
+  </p:clrMapOvr>
+</p:notes>
+</file>
+
+<file path=ppt/notesSlides/notesSlide12.xml><?xml version="1.0" encoding="utf-8"?>
+<p:notes xmlns:a="http://schemas.openxmlformats.org/drawingml/2006/main" xmlns:r="http://schemas.openxmlformats.org/officeDocument/2006/relationships" xmlns:p="http://schemas.openxmlformats.org/presentationml/2006/main">
+  <p:cSld>
+    <p:spTree>
+      <p:nvGrpSpPr>
+        <p:cNvPr id="1" name=""/>
+        <p:cNvGrpSpPr/>
+        <p:nvPr/>
+      </p:nvGrpSpPr>
+      <p:grpSpPr>
+        <a:xfrm>
+          <a:off x="0" y="0"/>
+          <a:ext cx="0" cy="0"/>
+          <a:chOff x="0" y="0"/>
+          <a:chExt cx="0" cy="0"/>
+        </a:xfrm>
+      </p:grpSpPr>
+      <p:sp>
+        <p:nvSpPr>
+          <p:cNvPr id="2" name="Slide Image Placeholder 1"/>
+          <p:cNvSpPr>
+            <a:spLocks noGrp="1" noRot="1" noChangeAspect="1"/>
+          </p:cNvSpPr>
+          <p:nvPr>
+            <p:ph type="sldImg"/>
+          </p:nvPr>
+        </p:nvSpPr>
+        <p:spPr/>
+      </p:sp>
+      <p:sp>
+        <p:nvSpPr>
+          <p:cNvPr id="3" name="Notes Placeholder 2"/>
+          <p:cNvSpPr>
+            <a:spLocks noGrp="1"/>
+          </p:cNvSpPr>
+          <p:nvPr>
+            <p:ph type="body" idx="1"/>
+          </p:nvPr>
+        </p:nvSpPr>
+        <p:spPr/>
+        <p:txBody>
+          <a:bodyPr/>
+          <a:lstStyle/>
+          <a:p>
+            <a:r>
+              <a:rPr lang="en-US" dirty="0"/>
+              <a:t>Этот слайд можно оставить на экране, пока жюри сканирует код.</a:t>
+            </a:r>
+            <a:endParaRPr lang="en-US" dirty="0"/>
+          </a:p>
+        </p:txBody>
+      </p:sp>
+      <p:sp>
+        <p:nvSpPr>
+          <p:cNvPr id="4" name="Slide Number Placeholder 3"/>
+          <p:cNvSpPr>
+            <a:spLocks noGrp="1"/>
+          </p:cNvSpPr>
+          <p:nvPr>
+            <p:ph type="sldNum" sz="quarter" idx="10"/>
+          </p:nvPr>
+        </p:nvSpPr>
+        <p:spPr/>
+        <p:txBody>
+          <a:bodyPr/>
+          <a:lstStyle/>
+          <a:p>
+            <a:fld id="{F7021451-1387-4CA6-816F-3879F97B5CBC}" type="slidenum">
+              <a:rPr lang="en-US"/>
+              <a:t>12</a:t>
             </a:fld>
             <a:endParaRPr lang="en-US"/>
           </a:p>
@@ -1746,9 +1835,16 @@
   <p:cSld name="Slide 1">
     <p:bg>
       <p:bgPr>
-        <a:solidFill>
-          <a:srgbClr val="16212C"/>
-        </a:solidFill>
+        <a:blipFill dpi="0" rotWithShape="1">
+          <a:blip r:embed="rId1">
+            <a:lum/>
+          </a:blip>
+          <a:srcRect/>
+          <a:stretch>
+            <a:fillRect/>
+          </a:stretch>
+        </a:blipFill>
+        <a:effectLst/>
       </p:bgPr>
     </p:bg>
     <p:spTree>
@@ -1774,7 +1870,7 @@
           <p:nvPr/>
         </p:nvPicPr>
         <p:blipFill>
-          <a:blip r:embed="rId1"/>
+          <a:blip r:embed="rId2"/>
           <a:stretch>
             <a:fillRect/>
           </a:stretch>
@@ -1782,7 +1878,7 @@
         <p:spPr>
           <a:xfrm>
             <a:off x="5989320" y="310896"/>
-            <a:ext cx="2313432" cy="4526280"/>
+            <a:ext cx="2311292" cy="4526280"/>
           </a:xfrm>
           <a:prstGeom prst="rect">
             <a:avLst/>
@@ -1797,17 +1893,17 @@
         </p:nvSpPr>
         <p:spPr>
           <a:xfrm>
-            <a:off x="502920" y="1170432"/>
-            <a:ext cx="5120640" cy="365760"/>
-          </a:xfrm>
-          <a:prstGeom prst="rect">
-            <a:avLst/>
-          </a:prstGeom>
-          <a:noFill/>
-          <a:ln/>
-        </p:spPr>
-        <p:txBody>
-          <a:bodyPr wrap="square" lIns="0" tIns="0" rIns="0" bIns="0" rtlCol="0" anchor="ctr"/>
+            <a:off x="502920" y="1298448"/>
+            <a:ext cx="5120640" cy="310896"/>
+          </a:xfrm>
+          <a:prstGeom prst="rect">
+            <a:avLst/>
+          </a:prstGeom>
+          <a:noFill/>
+          <a:ln/>
+        </p:spPr>
+        <p:txBody>
+          <a:bodyPr wrap="square" lIns="0" tIns="0" rIns="0" bIns="0" rtlCol="0" anchor="t"/>
           <a:lstStyle/>
           <a:p>
             <a:pPr indent="0" marL="0">
@@ -1836,17 +1932,17 @@
         </p:nvSpPr>
         <p:spPr>
           <a:xfrm>
-            <a:off x="502920" y="1463040"/>
-            <a:ext cx="5120640" cy="1005840"/>
-          </a:xfrm>
-          <a:prstGeom prst="rect">
-            <a:avLst/>
-          </a:prstGeom>
-          <a:noFill/>
-          <a:ln/>
-        </p:spPr>
-        <p:txBody>
-          <a:bodyPr wrap="square" lIns="0" tIns="0" rIns="0" bIns="0" rtlCol="0" anchor="ctr"/>
+            <a:off x="502920" y="1554480"/>
+            <a:ext cx="5120640" cy="1060704"/>
+          </a:xfrm>
+          <a:prstGeom prst="rect">
+            <a:avLst/>
+          </a:prstGeom>
+          <a:noFill/>
+          <a:ln/>
+        </p:spPr>
+        <p:txBody>
+          <a:bodyPr wrap="square" lIns="0" tIns="0" rIns="0" bIns="0" rtlCol="0" anchor="t"/>
           <a:lstStyle/>
           <a:p>
             <a:pPr indent="0" marL="0">
@@ -1875,17 +1971,17 @@
         </p:nvSpPr>
         <p:spPr>
           <a:xfrm>
-            <a:off x="502920" y="2560320"/>
-            <a:ext cx="4846320" cy="731520"/>
-          </a:xfrm>
-          <a:prstGeom prst="rect">
-            <a:avLst/>
-          </a:prstGeom>
-          <a:noFill/>
-          <a:ln/>
-        </p:spPr>
-        <p:txBody>
-          <a:bodyPr wrap="square" lIns="0" tIns="0" rIns="0" bIns="0" rtlCol="0" anchor="ctr"/>
+            <a:off x="502920" y="2633472"/>
+            <a:ext cx="4846320" cy="713232"/>
+          </a:xfrm>
+          <a:prstGeom prst="rect">
+            <a:avLst/>
+          </a:prstGeom>
+          <a:noFill/>
+          <a:ln/>
+        </p:spPr>
+        <p:txBody>
+          <a:bodyPr wrap="square" lIns="0" tIns="0" rIns="0" bIns="0" rtlCol="0" anchor="t"/>
           <a:lstStyle/>
           <a:p>
             <a:pPr indent="0" marL="0">
@@ -1903,7 +1999,7 @@
                 <a:ea typeface="Calibri" pitchFamily="34" charset="-122"/>
                 <a:cs typeface="Calibri" pitchFamily="34" charset="-120"/>
               </a:rPr>
-              <a:t>Приложение о безопасности в сети для детей 10–12 лет и их родителей</a:t>
+              <a:t>Приложение о безопасности в сети для детей от 10 до 12 лет и их родителей</a:t>
             </a:r>
             <a:endParaRPr lang="en-US" sz="1700" dirty="0"/>
           </a:p>
@@ -1917,7 +2013,7 @@
         </p:nvSpPr>
         <p:spPr>
           <a:xfrm>
-            <a:off x="502920" y="3419856"/>
+            <a:off x="502920" y="3529584"/>
             <a:ext cx="4846320" cy="274320"/>
           </a:xfrm>
           <a:prstGeom prst="rect">
@@ -1927,7 +2023,7 @@
           <a:ln/>
         </p:spPr>
         <p:txBody>
-          <a:bodyPr wrap="square" lIns="0" tIns="0" rIns="0" bIns="0" rtlCol="0" anchor="ctr"/>
+          <a:bodyPr wrap="square" lIns="0" tIns="0" rIns="0" bIns="0" rtlCol="0" anchor="t"/>
           <a:lstStyle/>
           <a:p>
             <a:pPr indent="0" marL="0">
@@ -1956,7 +2052,7 @@
         </p:nvSpPr>
         <p:spPr>
           <a:xfrm>
-            <a:off x="502920" y="3968496"/>
+            <a:off x="502920" y="4041648"/>
             <a:ext cx="5120640" cy="310896"/>
           </a:xfrm>
           <a:prstGeom prst="rect">
@@ -1966,7 +2062,7 @@
           <a:ln/>
         </p:spPr>
         <p:txBody>
-          <a:bodyPr wrap="square" lIns="0" tIns="0" rIns="0" bIns="0" rtlCol="0" anchor="ctr"/>
+          <a:bodyPr wrap="square" lIns="0" tIns="0" rIns="0" bIns="0" rtlCol="0" anchor="t"/>
           <a:lstStyle/>
           <a:p>
             <a:pPr indent="0" marL="0">
@@ -2027,7 +2123,7 @@
         </p:nvSpPr>
         <p:spPr>
           <a:xfrm>
-            <a:off x="502920" y="219456"/>
+            <a:off x="502920" y="256032"/>
             <a:ext cx="8138160" cy="219456"/>
           </a:xfrm>
           <a:prstGeom prst="rect">
@@ -2037,7 +2133,7 @@
           <a:ln/>
         </p:spPr>
         <p:txBody>
-          <a:bodyPr wrap="square" lIns="0" tIns="0" rIns="0" bIns="0" rtlCol="0" anchor="ctr"/>
+          <a:bodyPr wrap="square" lIns="0" tIns="0" rIns="0" bIns="0" rtlCol="0" anchor="t"/>
           <a:lstStyle/>
           <a:p>
             <a:pPr indent="0" marL="0">
@@ -2066,17 +2162,17 @@
         </p:nvSpPr>
         <p:spPr>
           <a:xfrm>
-            <a:off x="502920" y="384048"/>
-            <a:ext cx="8138160" cy="621792"/>
-          </a:xfrm>
-          <a:prstGeom prst="rect">
-            <a:avLst/>
-          </a:prstGeom>
-          <a:noFill/>
-          <a:ln/>
-        </p:spPr>
-        <p:txBody>
-          <a:bodyPr wrap="square" lIns="0" tIns="0" rIns="0" bIns="0" rtlCol="0" anchor="ctr"/>
+            <a:off x="502920" y="457200"/>
+            <a:ext cx="8138160" cy="603504"/>
+          </a:xfrm>
+          <a:prstGeom prst="rect">
+            <a:avLst/>
+          </a:prstGeom>
+          <a:noFill/>
+          <a:ln/>
+        </p:spPr>
+        <p:txBody>
+          <a:bodyPr wrap="square" lIns="0" tIns="0" rIns="0" bIns="0" rtlCol="0" anchor="t"/>
           <a:lstStyle/>
           <a:p>
             <a:pPr indent="0" marL="0">
@@ -2091,7 +2187,7 @@
                 <a:ea typeface="Cambria" pitchFamily="34" charset="-122"/>
                 <a:cs typeface="Cambria" pitchFamily="34" charset="-120"/>
               </a:rPr>
-              <a:t>Работает без установки и без интернета</a:t>
+              <a:t>Без установки и без интернета</a:t>
             </a:r>
             <a:endParaRPr lang="en-US" sz="3200" dirty="0"/>
           </a:p>
@@ -2113,8 +2209,8 @@
         </p:blipFill>
         <p:spPr>
           <a:xfrm>
-            <a:off x="6400800" y="1234440"/>
-            <a:ext cx="1819656" cy="3566160"/>
+            <a:off x="6913448" y="1188720"/>
+            <a:ext cx="1727632" cy="3383280"/>
           </a:xfrm>
           <a:prstGeom prst="rect">
             <a:avLst/>
@@ -2129,8 +2225,8 @@
         </p:nvSpPr>
         <p:spPr>
           <a:xfrm>
-            <a:off x="502920" y="1280160"/>
-            <a:ext cx="5669280" cy="786384"/>
+            <a:off x="502920" y="1188720"/>
+            <a:ext cx="6136208" cy="786384"/>
           </a:xfrm>
           <a:prstGeom prst="roundRect">
             <a:avLst>
@@ -2163,7 +2259,7 @@
         </p:nvSpPr>
         <p:spPr>
           <a:xfrm>
-            <a:off x="722376" y="1463040"/>
+            <a:off x="722376" y="1345692"/>
             <a:ext cx="118872" cy="118872"/>
           </a:xfrm>
           <a:prstGeom prst="ellipse">
@@ -2188,17 +2284,17 @@
         </p:nvSpPr>
         <p:spPr>
           <a:xfrm>
-            <a:off x="1014984" y="1380744"/>
-            <a:ext cx="4937760" cy="256032"/>
-          </a:xfrm>
-          <a:prstGeom prst="rect">
-            <a:avLst/>
-          </a:prstGeom>
-          <a:noFill/>
-          <a:ln/>
-        </p:spPr>
-        <p:txBody>
-          <a:bodyPr wrap="square" lIns="0" tIns="0" rIns="0" bIns="0" rtlCol="0" anchor="ctr"/>
+            <a:off x="1014984" y="1298448"/>
+            <a:ext cx="5404688" cy="237744"/>
+          </a:xfrm>
+          <a:prstGeom prst="rect">
+            <a:avLst/>
+          </a:prstGeom>
+          <a:noFill/>
+          <a:ln/>
+        </p:spPr>
+        <p:txBody>
+          <a:bodyPr wrap="square" lIns="0" tIns="0" rIns="0" bIns="0" rtlCol="0" anchor="t"/>
           <a:lstStyle/>
           <a:p>
             <a:pPr indent="0" marL="0">
@@ -2227,17 +2323,17 @@
         </p:nvSpPr>
         <p:spPr>
           <a:xfrm>
-            <a:off x="1014984" y="1636776"/>
-            <a:ext cx="5029200" cy="384048"/>
-          </a:xfrm>
-          <a:prstGeom prst="rect">
-            <a:avLst/>
-          </a:prstGeom>
-          <a:noFill/>
-          <a:ln/>
-        </p:spPr>
-        <p:txBody>
-          <a:bodyPr wrap="square" lIns="0" tIns="0" rIns="0" bIns="0" rtlCol="0" anchor="ctr"/>
+            <a:off x="1014984" y="1554480"/>
+            <a:ext cx="5404688" cy="384048"/>
+          </a:xfrm>
+          <a:prstGeom prst="rect">
+            <a:avLst/>
+          </a:prstGeom>
+          <a:noFill/>
+          <a:ln/>
+        </p:spPr>
+        <p:txBody>
+          <a:bodyPr wrap="square" lIns="0" tIns="0" rIns="0" bIns="0" rtlCol="0" anchor="t"/>
           <a:lstStyle/>
           <a:p>
             <a:pPr indent="0" marL="0">
@@ -2269,8 +2365,8 @@
         </p:nvSpPr>
         <p:spPr>
           <a:xfrm>
-            <a:off x="502920" y="2176272"/>
-            <a:ext cx="5669280" cy="786384"/>
+            <a:off x="502920" y="2048256"/>
+            <a:ext cx="6136208" cy="786384"/>
           </a:xfrm>
           <a:prstGeom prst="roundRect">
             <a:avLst>
@@ -2303,7 +2399,7 @@
         </p:nvSpPr>
         <p:spPr>
           <a:xfrm>
-            <a:off x="722376" y="2359152"/>
+            <a:off x="722376" y="2205228"/>
             <a:ext cx="118872" cy="118872"/>
           </a:xfrm>
           <a:prstGeom prst="ellipse">
@@ -2328,17 +2424,17 @@
         </p:nvSpPr>
         <p:spPr>
           <a:xfrm>
-            <a:off x="1014984" y="2276856"/>
-            <a:ext cx="4937760" cy="256032"/>
-          </a:xfrm>
-          <a:prstGeom prst="rect">
-            <a:avLst/>
-          </a:prstGeom>
-          <a:noFill/>
-          <a:ln/>
-        </p:spPr>
-        <p:txBody>
-          <a:bodyPr wrap="square" lIns="0" tIns="0" rIns="0" bIns="0" rtlCol="0" anchor="ctr"/>
+            <a:off x="1014984" y="2157984"/>
+            <a:ext cx="5404688" cy="237744"/>
+          </a:xfrm>
+          <a:prstGeom prst="rect">
+            <a:avLst/>
+          </a:prstGeom>
+          <a:noFill/>
+          <a:ln/>
+        </p:spPr>
+        <p:txBody>
+          <a:bodyPr wrap="square" lIns="0" tIns="0" rIns="0" bIns="0" rtlCol="0" anchor="t"/>
           <a:lstStyle/>
           <a:p>
             <a:pPr indent="0" marL="0">
@@ -2367,17 +2463,17 @@
         </p:nvSpPr>
         <p:spPr>
           <a:xfrm>
-            <a:off x="1014984" y="2532888"/>
-            <a:ext cx="5029200" cy="384048"/>
-          </a:xfrm>
-          <a:prstGeom prst="rect">
-            <a:avLst/>
-          </a:prstGeom>
-          <a:noFill/>
-          <a:ln/>
-        </p:spPr>
-        <p:txBody>
-          <a:bodyPr wrap="square" lIns="0" tIns="0" rIns="0" bIns="0" rtlCol="0" anchor="ctr"/>
+            <a:off x="1014984" y="2414016"/>
+            <a:ext cx="5404688" cy="384048"/>
+          </a:xfrm>
+          <a:prstGeom prst="rect">
+            <a:avLst/>
+          </a:prstGeom>
+          <a:noFill/>
+          <a:ln/>
+        </p:spPr>
+        <p:txBody>
+          <a:bodyPr wrap="square" lIns="0" tIns="0" rIns="0" bIns="0" rtlCol="0" anchor="t"/>
           <a:lstStyle/>
           <a:p>
             <a:pPr indent="0" marL="0">
@@ -2409,8 +2505,8 @@
         </p:nvSpPr>
         <p:spPr>
           <a:xfrm>
-            <a:off x="502920" y="3072384"/>
-            <a:ext cx="5669280" cy="786384"/>
+            <a:off x="502920" y="2907792"/>
+            <a:ext cx="6136208" cy="786384"/>
           </a:xfrm>
           <a:prstGeom prst="roundRect">
             <a:avLst>
@@ -2443,7 +2539,7 @@
         </p:nvSpPr>
         <p:spPr>
           <a:xfrm>
-            <a:off x="722376" y="3255264"/>
+            <a:off x="722376" y="3064764"/>
             <a:ext cx="118872" cy="118872"/>
           </a:xfrm>
           <a:prstGeom prst="ellipse">
@@ -2468,17 +2564,17 @@
         </p:nvSpPr>
         <p:spPr>
           <a:xfrm>
-            <a:off x="1014984" y="3172968"/>
-            <a:ext cx="4937760" cy="256032"/>
-          </a:xfrm>
-          <a:prstGeom prst="rect">
-            <a:avLst/>
-          </a:prstGeom>
-          <a:noFill/>
-          <a:ln/>
-        </p:spPr>
-        <p:txBody>
-          <a:bodyPr wrap="square" lIns="0" tIns="0" rIns="0" bIns="0" rtlCol="0" anchor="ctr"/>
+            <a:off x="1014984" y="3017520"/>
+            <a:ext cx="5404688" cy="237744"/>
+          </a:xfrm>
+          <a:prstGeom prst="rect">
+            <a:avLst/>
+          </a:prstGeom>
+          <a:noFill/>
+          <a:ln/>
+        </p:spPr>
+        <p:txBody>
+          <a:bodyPr wrap="square" lIns="0" tIns="0" rIns="0" bIns="0" rtlCol="0" anchor="t"/>
           <a:lstStyle/>
           <a:p>
             <a:pPr indent="0" marL="0">
@@ -2507,17 +2603,17 @@
         </p:nvSpPr>
         <p:spPr>
           <a:xfrm>
-            <a:off x="1014984" y="3429000"/>
-            <a:ext cx="5029200" cy="384048"/>
-          </a:xfrm>
-          <a:prstGeom prst="rect">
-            <a:avLst/>
-          </a:prstGeom>
-          <a:noFill/>
-          <a:ln/>
-        </p:spPr>
-        <p:txBody>
-          <a:bodyPr wrap="square" lIns="0" tIns="0" rIns="0" bIns="0" rtlCol="0" anchor="ctr"/>
+            <a:off x="1014984" y="3273552"/>
+            <a:ext cx="5404688" cy="384048"/>
+          </a:xfrm>
+          <a:prstGeom prst="rect">
+            <a:avLst/>
+          </a:prstGeom>
+          <a:noFill/>
+          <a:ln/>
+        </p:spPr>
+        <p:txBody>
+          <a:bodyPr wrap="square" lIns="0" tIns="0" rIns="0" bIns="0" rtlCol="0" anchor="t"/>
           <a:lstStyle/>
           <a:p>
             <a:pPr indent="0" marL="0">
@@ -2535,7 +2631,7 @@
                 <a:ea typeface="Calibri" pitchFamily="34" charset="-122"/>
                 <a:cs typeface="Calibri" pitchFamily="34" charset="-120"/>
               </a:rPr>
-              <a:t>После первого открытия сеть не нужна — подойдёт классу со слабым вайфаем.</a:t>
+              <a:t>После первого открытия сеть не нужна. Подойдёт классу со слабым вайфаем.</a:t>
             </a:r>
             <a:endParaRPr lang="en-US" sz="1150" dirty="0"/>
           </a:p>
@@ -2549,8 +2645,8 @@
         </p:nvSpPr>
         <p:spPr>
           <a:xfrm>
-            <a:off x="502920" y="3968496"/>
-            <a:ext cx="5669280" cy="786384"/>
+            <a:off x="502920" y="3767328"/>
+            <a:ext cx="6136208" cy="786384"/>
           </a:xfrm>
           <a:prstGeom prst="roundRect">
             <a:avLst>
@@ -2583,7 +2679,7 @@
         </p:nvSpPr>
         <p:spPr>
           <a:xfrm>
-            <a:off x="722376" y="4151376"/>
+            <a:off x="722376" y="3924300"/>
             <a:ext cx="118872" cy="118872"/>
           </a:xfrm>
           <a:prstGeom prst="ellipse">
@@ -2608,17 +2704,17 @@
         </p:nvSpPr>
         <p:spPr>
           <a:xfrm>
-            <a:off x="1014984" y="4069080"/>
-            <a:ext cx="4937760" cy="256032"/>
-          </a:xfrm>
-          <a:prstGeom prst="rect">
-            <a:avLst/>
-          </a:prstGeom>
-          <a:noFill/>
-          <a:ln/>
-        </p:spPr>
-        <p:txBody>
-          <a:bodyPr wrap="square" lIns="0" tIns="0" rIns="0" bIns="0" rtlCol="0" anchor="ctr"/>
+            <a:off x="1014984" y="3877056"/>
+            <a:ext cx="5404688" cy="237744"/>
+          </a:xfrm>
+          <a:prstGeom prst="rect">
+            <a:avLst/>
+          </a:prstGeom>
+          <a:noFill/>
+          <a:ln/>
+        </p:spPr>
+        <p:txBody>
+          <a:bodyPr wrap="square" lIns="0" tIns="0" rIns="0" bIns="0" rtlCol="0" anchor="t"/>
           <a:lstStyle/>
           <a:p>
             <a:pPr indent="0" marL="0">
@@ -2647,17 +2743,17 @@
         </p:nvSpPr>
         <p:spPr>
           <a:xfrm>
-            <a:off x="1014984" y="4325112"/>
-            <a:ext cx="5029200" cy="384048"/>
-          </a:xfrm>
-          <a:prstGeom prst="rect">
-            <a:avLst/>
-          </a:prstGeom>
-          <a:noFill/>
-          <a:ln/>
-        </p:spPr>
-        <p:txBody>
-          <a:bodyPr wrap="square" lIns="0" tIns="0" rIns="0" bIns="0" rtlCol="0" anchor="ctr"/>
+            <a:off x="1014984" y="4133088"/>
+            <a:ext cx="5404688" cy="384048"/>
+          </a:xfrm>
+          <a:prstGeom prst="rect">
+            <a:avLst/>
+          </a:prstGeom>
+          <a:noFill/>
+          <a:ln/>
+        </p:spPr>
+        <p:txBody>
+          <a:bodyPr wrap="square" lIns="0" tIns="0" rIns="0" bIns="0" rtlCol="0" anchor="t"/>
           <a:lstStyle/>
           <a:p>
             <a:pPr indent="0" marL="0">
@@ -2721,7 +2817,7 @@
         </p:nvSpPr>
         <p:spPr>
           <a:xfrm>
-            <a:off x="502920" y="219456"/>
+            <a:off x="502920" y="256032"/>
             <a:ext cx="8138160" cy="219456"/>
           </a:xfrm>
           <a:prstGeom prst="rect">
@@ -2731,7 +2827,7 @@
           <a:ln/>
         </p:spPr>
         <p:txBody>
-          <a:bodyPr wrap="square" lIns="0" tIns="0" rIns="0" bIns="0" rtlCol="0" anchor="ctr"/>
+          <a:bodyPr wrap="square" lIns="0" tIns="0" rIns="0" bIns="0" rtlCol="0" anchor="t"/>
           <a:lstStyle/>
           <a:p>
             <a:pPr indent="0" marL="0">
@@ -2760,17 +2856,17 @@
         </p:nvSpPr>
         <p:spPr>
           <a:xfrm>
-            <a:off x="502920" y="384048"/>
-            <a:ext cx="8138160" cy="621792"/>
-          </a:xfrm>
-          <a:prstGeom prst="rect">
-            <a:avLst/>
-          </a:prstGeom>
-          <a:noFill/>
-          <a:ln/>
-        </p:spPr>
-        <p:txBody>
-          <a:bodyPr wrap="square" lIns="0" tIns="0" rIns="0" bIns="0" rtlCol="0" anchor="ctr"/>
+            <a:off x="502920" y="457200"/>
+            <a:ext cx="8138160" cy="603504"/>
+          </a:xfrm>
+          <a:prstGeom prst="rect">
+            <a:avLst/>
+          </a:prstGeom>
+          <a:noFill/>
+          <a:ln/>
+        </p:spPr>
+        <p:txBody>
+          <a:bodyPr wrap="square" lIns="0" tIns="0" rIns="0" bIns="0" rtlCol="0" anchor="t"/>
           <a:lstStyle/>
           <a:p>
             <a:pPr indent="0" marL="0">
@@ -2799,17 +2895,17 @@
         </p:nvSpPr>
         <p:spPr>
           <a:xfrm>
-            <a:off x="502920" y="1389888"/>
-            <a:ext cx="3840480" cy="292608"/>
-          </a:xfrm>
-          <a:prstGeom prst="rect">
-            <a:avLst/>
-          </a:prstGeom>
-          <a:noFill/>
-          <a:ln/>
-        </p:spPr>
-        <p:txBody>
-          <a:bodyPr wrap="square" lIns="0" tIns="0" rIns="0" bIns="0" rtlCol="0" anchor="ctr"/>
+            <a:off x="502920" y="1316736"/>
+            <a:ext cx="4069080" cy="274320"/>
+          </a:xfrm>
+          <a:prstGeom prst="rect">
+            <a:avLst/>
+          </a:prstGeom>
+          <a:noFill/>
+          <a:ln/>
+        </p:spPr>
+        <p:txBody>
+          <a:bodyPr wrap="square" lIns="0" tIns="0" rIns="0" bIns="0" rtlCol="0" anchor="t"/>
           <a:lstStyle/>
           <a:p>
             <a:pPr indent="0" marL="0">
@@ -2838,7 +2934,7 @@
         </p:nvSpPr>
         <p:spPr>
           <a:xfrm>
-            <a:off x="521208" y="1892808"/>
+            <a:off x="521208" y="1725930"/>
             <a:ext cx="118872" cy="118872"/>
           </a:xfrm>
           <a:prstGeom prst="ellipse">
@@ -2863,17 +2959,17 @@
         </p:nvSpPr>
         <p:spPr>
           <a:xfrm>
-            <a:off x="777240" y="1810512"/>
-            <a:ext cx="3566160" cy="310896"/>
-          </a:xfrm>
-          <a:prstGeom prst="rect">
-            <a:avLst/>
-          </a:prstGeom>
-          <a:noFill/>
-          <a:ln/>
-        </p:spPr>
-        <p:txBody>
-          <a:bodyPr wrap="square" lIns="0" tIns="0" rIns="0" bIns="0" rtlCol="0" anchor="ctr"/>
+            <a:off x="777240" y="1682496"/>
+            <a:ext cx="3794760" cy="256032"/>
+          </a:xfrm>
+          <a:prstGeom prst="rect">
+            <a:avLst/>
+          </a:prstGeom>
+          <a:noFill/>
+          <a:ln/>
+        </p:spPr>
+        <p:txBody>
+          <a:bodyPr wrap="square" lIns="0" tIns="0" rIns="0" bIns="0" rtlCol="0" anchor="t"/>
           <a:lstStyle/>
           <a:p>
             <a:pPr indent="0" marL="0">
@@ -2902,7 +2998,7 @@
         </p:nvSpPr>
         <p:spPr>
           <a:xfrm>
-            <a:off x="521208" y="2404872"/>
+            <a:off x="521208" y="2237994"/>
             <a:ext cx="118872" cy="118872"/>
           </a:xfrm>
           <a:prstGeom prst="ellipse">
@@ -2927,17 +3023,17 @@
         </p:nvSpPr>
         <p:spPr>
           <a:xfrm>
-            <a:off x="777240" y="2322576"/>
-            <a:ext cx="3566160" cy="310896"/>
-          </a:xfrm>
-          <a:prstGeom prst="rect">
-            <a:avLst/>
-          </a:prstGeom>
-          <a:noFill/>
-          <a:ln/>
-        </p:spPr>
-        <p:txBody>
-          <a:bodyPr wrap="square" lIns="0" tIns="0" rIns="0" bIns="0" rtlCol="0" anchor="ctr"/>
+            <a:off x="777240" y="2194560"/>
+            <a:ext cx="3794760" cy="256032"/>
+          </a:xfrm>
+          <a:prstGeom prst="rect">
+            <a:avLst/>
+          </a:prstGeom>
+          <a:noFill/>
+          <a:ln/>
+        </p:spPr>
+        <p:txBody>
+          <a:bodyPr wrap="square" lIns="0" tIns="0" rIns="0" bIns="0" rtlCol="0" anchor="t"/>
           <a:lstStyle/>
           <a:p>
             <a:pPr indent="0" marL="0">
@@ -2966,7 +3062,7 @@
         </p:nvSpPr>
         <p:spPr>
           <a:xfrm>
-            <a:off x="521208" y="2916936"/>
+            <a:off x="521208" y="2750058"/>
             <a:ext cx="118872" cy="118872"/>
           </a:xfrm>
           <a:prstGeom prst="ellipse">
@@ -2991,17 +3087,17 @@
         </p:nvSpPr>
         <p:spPr>
           <a:xfrm>
-            <a:off x="777240" y="2834640"/>
-            <a:ext cx="3566160" cy="310896"/>
-          </a:xfrm>
-          <a:prstGeom prst="rect">
-            <a:avLst/>
-          </a:prstGeom>
-          <a:noFill/>
-          <a:ln/>
-        </p:spPr>
-        <p:txBody>
-          <a:bodyPr wrap="square" lIns="0" tIns="0" rIns="0" bIns="0" rtlCol="0" anchor="ctr"/>
+            <a:off x="777240" y="2706624"/>
+            <a:ext cx="3794760" cy="256032"/>
+          </a:xfrm>
+          <a:prstGeom prst="rect">
+            <a:avLst/>
+          </a:prstGeom>
+          <a:noFill/>
+          <a:ln/>
+        </p:spPr>
+        <p:txBody>
+          <a:bodyPr wrap="square" lIns="0" tIns="0" rIns="0" bIns="0" rtlCol="0" anchor="t"/>
           <a:lstStyle/>
           <a:p>
             <a:pPr indent="0" marL="0">
@@ -3030,7 +3126,7 @@
         </p:nvSpPr>
         <p:spPr>
           <a:xfrm>
-            <a:off x="521208" y="3429000"/>
+            <a:off x="521208" y="3262122"/>
             <a:ext cx="118872" cy="118872"/>
           </a:xfrm>
           <a:prstGeom prst="ellipse">
@@ -3055,17 +3151,17 @@
         </p:nvSpPr>
         <p:spPr>
           <a:xfrm>
-            <a:off x="777240" y="3346704"/>
-            <a:ext cx="3566160" cy="310896"/>
-          </a:xfrm>
-          <a:prstGeom prst="rect">
-            <a:avLst/>
-          </a:prstGeom>
-          <a:noFill/>
-          <a:ln/>
-        </p:spPr>
-        <p:txBody>
-          <a:bodyPr wrap="square" lIns="0" tIns="0" rIns="0" bIns="0" rtlCol="0" anchor="ctr"/>
+            <a:off x="777240" y="3218688"/>
+            <a:ext cx="3794760" cy="256032"/>
+          </a:xfrm>
+          <a:prstGeom prst="rect">
+            <a:avLst/>
+          </a:prstGeom>
+          <a:noFill/>
+          <a:ln/>
+        </p:spPr>
+        <p:txBody>
+          <a:bodyPr wrap="square" lIns="0" tIns="0" rIns="0" bIns="0" rtlCol="0" anchor="t"/>
           <a:lstStyle/>
           <a:p>
             <a:pPr indent="0" marL="0">
@@ -3094,17 +3190,17 @@
         </p:nvSpPr>
         <p:spPr>
           <a:xfrm>
-            <a:off x="4800600" y="1389888"/>
-            <a:ext cx="3840480" cy="292608"/>
-          </a:xfrm>
-          <a:prstGeom prst="rect">
-            <a:avLst/>
-          </a:prstGeom>
-          <a:noFill/>
-          <a:ln/>
-        </p:spPr>
-        <p:txBody>
-          <a:bodyPr wrap="square" lIns="0" tIns="0" rIns="0" bIns="0" rtlCol="0" anchor="ctr"/>
+            <a:off x="4800600" y="1316736"/>
+            <a:ext cx="3840480" cy="274320"/>
+          </a:xfrm>
+          <a:prstGeom prst="rect">
+            <a:avLst/>
+          </a:prstGeom>
+          <a:noFill/>
+          <a:ln/>
+        </p:spPr>
+        <p:txBody>
+          <a:bodyPr wrap="square" lIns="0" tIns="0" rIns="0" bIns="0" rtlCol="0" anchor="t"/>
           <a:lstStyle/>
           <a:p>
             <a:pPr indent="0" marL="0">
@@ -3133,7 +3229,7 @@
         </p:nvSpPr>
         <p:spPr>
           <a:xfrm>
-            <a:off x="4818888" y="1892808"/>
+            <a:off x="4818888" y="1725930"/>
             <a:ext cx="118872" cy="118872"/>
           </a:xfrm>
           <a:prstGeom prst="ellipse">
@@ -3158,17 +3254,17 @@
         </p:nvSpPr>
         <p:spPr>
           <a:xfrm>
-            <a:off x="5074920" y="1810512"/>
-            <a:ext cx="3566160" cy="310896"/>
-          </a:xfrm>
-          <a:prstGeom prst="rect">
-            <a:avLst/>
-          </a:prstGeom>
-          <a:noFill/>
-          <a:ln/>
-        </p:spPr>
-        <p:txBody>
-          <a:bodyPr wrap="square" lIns="0" tIns="0" rIns="0" bIns="0" rtlCol="0" anchor="ctr"/>
+            <a:off x="5074920" y="1682496"/>
+            <a:ext cx="3566160" cy="256032"/>
+          </a:xfrm>
+          <a:prstGeom prst="rect">
+            <a:avLst/>
+          </a:prstGeom>
+          <a:noFill/>
+          <a:ln/>
+        </p:spPr>
+        <p:txBody>
+          <a:bodyPr wrap="square" lIns="0" tIns="0" rIns="0" bIns="0" rtlCol="0" anchor="t"/>
           <a:lstStyle/>
           <a:p>
             <a:pPr indent="0" marL="0">
@@ -3197,7 +3293,7 @@
         </p:nvSpPr>
         <p:spPr>
           <a:xfrm>
-            <a:off x="4818888" y="2404872"/>
+            <a:off x="4818888" y="2237994"/>
             <a:ext cx="118872" cy="118872"/>
           </a:xfrm>
           <a:prstGeom prst="ellipse">
@@ -3222,17 +3318,17 @@
         </p:nvSpPr>
         <p:spPr>
           <a:xfrm>
-            <a:off x="5074920" y="2322576"/>
-            <a:ext cx="3566160" cy="310896"/>
-          </a:xfrm>
-          <a:prstGeom prst="rect">
-            <a:avLst/>
-          </a:prstGeom>
-          <a:noFill/>
-          <a:ln/>
-        </p:spPr>
-        <p:txBody>
-          <a:bodyPr wrap="square" lIns="0" tIns="0" rIns="0" bIns="0" rtlCol="0" anchor="ctr"/>
+            <a:off x="5074920" y="2194560"/>
+            <a:ext cx="3566160" cy="256032"/>
+          </a:xfrm>
+          <a:prstGeom prst="rect">
+            <a:avLst/>
+          </a:prstGeom>
+          <a:noFill/>
+          <a:ln/>
+        </p:spPr>
+        <p:txBody>
+          <a:bodyPr wrap="square" lIns="0" tIns="0" rIns="0" bIns="0" rtlCol="0" anchor="t"/>
           <a:lstStyle/>
           <a:p>
             <a:pPr indent="0" marL="0">
@@ -3261,7 +3357,7 @@
         </p:nvSpPr>
         <p:spPr>
           <a:xfrm>
-            <a:off x="4818888" y="2916936"/>
+            <a:off x="4818888" y="2750058"/>
             <a:ext cx="118872" cy="118872"/>
           </a:xfrm>
           <a:prstGeom prst="ellipse">
@@ -3286,17 +3382,17 @@
         </p:nvSpPr>
         <p:spPr>
           <a:xfrm>
-            <a:off x="5074920" y="2834640"/>
-            <a:ext cx="3566160" cy="310896"/>
-          </a:xfrm>
-          <a:prstGeom prst="rect">
-            <a:avLst/>
-          </a:prstGeom>
-          <a:noFill/>
-          <a:ln/>
-        </p:spPr>
-        <p:txBody>
-          <a:bodyPr wrap="square" lIns="0" tIns="0" rIns="0" bIns="0" rtlCol="0" anchor="ctr"/>
+            <a:off x="5074920" y="2706624"/>
+            <a:ext cx="3566160" cy="256032"/>
+          </a:xfrm>
+          <a:prstGeom prst="rect">
+            <a:avLst/>
+          </a:prstGeom>
+          <a:noFill/>
+          <a:ln/>
+        </p:spPr>
+        <p:txBody>
+          <a:bodyPr wrap="square" lIns="0" tIns="0" rIns="0" bIns="0" rtlCol="0" anchor="t"/>
           <a:lstStyle/>
           <a:p>
             <a:pPr indent="0" marL="0">
@@ -3325,7 +3421,7 @@
         </p:nvSpPr>
         <p:spPr>
           <a:xfrm>
-            <a:off x="4818888" y="3429000"/>
+            <a:off x="4818888" y="3262122"/>
             <a:ext cx="118872" cy="118872"/>
           </a:xfrm>
           <a:prstGeom prst="ellipse">
@@ -3350,17 +3446,17 @@
         </p:nvSpPr>
         <p:spPr>
           <a:xfrm>
-            <a:off x="5074920" y="3346704"/>
-            <a:ext cx="3566160" cy="310896"/>
-          </a:xfrm>
-          <a:prstGeom prst="rect">
-            <a:avLst/>
-          </a:prstGeom>
-          <a:noFill/>
-          <a:ln/>
-        </p:spPr>
-        <p:txBody>
-          <a:bodyPr wrap="square" lIns="0" tIns="0" rIns="0" bIns="0" rtlCol="0" anchor="ctr"/>
+            <a:off x="5074920" y="3218688"/>
+            <a:ext cx="3566160" cy="256032"/>
+          </a:xfrm>
+          <a:prstGeom prst="rect">
+            <a:avLst/>
+          </a:prstGeom>
+          <a:noFill/>
+          <a:ln/>
+        </p:spPr>
+        <p:txBody>
+          <a:bodyPr wrap="square" lIns="0" tIns="0" rIns="0" bIns="0" rtlCol="0" anchor="t"/>
           <a:lstStyle/>
           <a:p>
             <a:pPr indent="0" marL="0">
@@ -3389,12 +3485,12 @@
         </p:nvSpPr>
         <p:spPr>
           <a:xfrm>
-            <a:off x="502920" y="4041648"/>
-            <a:ext cx="8138160" cy="713232"/>
+            <a:off x="502920" y="3785616"/>
+            <a:ext cx="8138160" cy="804672"/>
           </a:xfrm>
           <a:prstGeom prst="roundRect">
             <a:avLst>
-              <a:gd name="adj" fmla="val 17949"/>
+              <a:gd name="adj" fmla="val 15909"/>
             </a:avLst>
           </a:prstGeom>
           <a:solidFill>
@@ -3423,8 +3519,8 @@
         </p:nvSpPr>
         <p:spPr>
           <a:xfrm>
-            <a:off x="777240" y="4160520"/>
-            <a:ext cx="4754880" cy="457200"/>
+            <a:off x="777240" y="3785616"/>
+            <a:ext cx="4754880" cy="804672"/>
           </a:xfrm>
           <a:prstGeom prst="rect">
             <a:avLst/>
@@ -3462,8 +3558,8 @@
         </p:nvSpPr>
         <p:spPr>
           <a:xfrm>
-            <a:off x="4937760" y="4160520"/>
-            <a:ext cx="3703320" cy="457200"/>
+            <a:off x="4937760" y="3785616"/>
+            <a:ext cx="3703320" cy="804672"/>
           </a:xfrm>
           <a:prstGeom prst="rect">
             <a:avLst/>
@@ -3487,9 +3583,143 @@
                 <a:ea typeface="Calibri" pitchFamily="34" charset="-122"/>
                 <a:cs typeface="Calibri" pitchFamily="34" charset="-120"/>
               </a:rPr>
-              <a:t>Откройте на телефоне, установка не нужна</a:t>
+              <a:t>Код для сканирования на следующем слайде</a:t>
             </a:r>
             <a:endParaRPr lang="en-US" sz="1300" dirty="0"/>
+          </a:p>
+        </p:txBody>
+      </p:sp>
+    </p:spTree>
+  </p:cSld>
+  <p:clrMapOvr>
+    <a:masterClrMapping/>
+  </p:clrMapOvr>
+</p:sld>
+</file>
+
+<file path=ppt/slides/slide12.xml><?xml version="1.0" encoding="utf-8"?>
+<p:sld xmlns:a="http://schemas.openxmlformats.org/drawingml/2006/main" xmlns:r="http://schemas.openxmlformats.org/officeDocument/2006/relationships" xmlns:p="http://schemas.openxmlformats.org/presentationml/2006/main">
+  <p:cSld name="Slide 12">
+    <p:bg>
+      <p:bgPr>
+        <a:solidFill>
+          <a:srgbClr val="16212C"/>
+        </a:solidFill>
+      </p:bgPr>
+    </p:bg>
+    <p:spTree>
+      <p:nvGrpSpPr>
+        <p:cNvPr id="1" name=""/>
+        <p:cNvGrpSpPr/>
+        <p:nvPr/>
+      </p:nvGrpSpPr>
+      <p:grpSpPr>
+        <a:xfrm>
+          <a:off x="0" y="0"/>
+          <a:ext cx="0" cy="0"/>
+          <a:chOff x="0" y="0"/>
+          <a:chExt cx="0" cy="0"/>
+        </a:xfrm>
+      </p:grpSpPr>
+      <p:sp>
+        <p:nvSpPr>
+          <p:cNvPr id="2" name="Text 0"/>
+          <p:cNvSpPr/>
+          <p:nvPr/>
+        </p:nvSpPr>
+        <p:spPr>
+          <a:xfrm>
+            <a:off x="0" y="237744"/>
+            <a:ext cx="9144000" cy="237744"/>
+          </a:xfrm>
+          <a:prstGeom prst="rect">
+            <a:avLst/>
+          </a:prstGeom>
+          <a:noFill/>
+          <a:ln/>
+        </p:spPr>
+        <p:txBody>
+          <a:bodyPr wrap="square" lIns="0" tIns="0" rIns="0" bIns="0" rtlCol="0" anchor="t"/>
+          <a:lstStyle/>
+          <a:p>
+            <a:pPr algn="ctr" indent="0" marL="0">
+              <a:buNone/>
+            </a:pPr>
+            <a:r>
+              <a:rPr lang="en-US" sz="1300" b="1" spc="300" kern="0" dirty="0">
+                <a:solidFill>
+                  <a:srgbClr val="45A9A8"/>
+                </a:solidFill>
+                <a:latin typeface="Calibri" pitchFamily="34" charset="0"/>
+                <a:ea typeface="Calibri" pitchFamily="34" charset="-122"/>
+                <a:cs typeface="Calibri" pitchFamily="34" charset="-120"/>
+              </a:rPr>
+              <a:t>ОТКРОЙТЕ С ТЕЛЕФОНА</a:t>
+            </a:r>
+            <a:endParaRPr lang="en-US" sz="1300" dirty="0"/>
+          </a:p>
+        </p:txBody>
+      </p:sp>
+      <p:pic>
+        <p:nvPicPr>
+          <p:cNvPr id="3" name="Image 0" descr="preencoded.png">    </p:cNvPr>
+          <p:cNvPicPr>
+            <a:picLocks noChangeAspect="1"/>
+          </p:cNvPicPr>
+          <p:nvPr/>
+        </p:nvPicPr>
+        <p:blipFill>
+          <a:blip r:embed="rId1"/>
+          <a:stretch>
+            <a:fillRect/>
+          </a:stretch>
+        </p:blipFill>
+        <p:spPr>
+          <a:xfrm>
+            <a:off x="2743200" y="621792"/>
+            <a:ext cx="3657600" cy="3657600"/>
+          </a:xfrm>
+          <a:prstGeom prst="rect">
+            <a:avLst/>
+          </a:prstGeom>
+        </p:spPr>
+      </p:pic>
+      <p:sp>
+        <p:nvSpPr>
+          <p:cNvPr id="4" name="Text 1"/>
+          <p:cNvSpPr/>
+          <p:nvPr/>
+        </p:nvSpPr>
+        <p:spPr>
+          <a:xfrm>
+            <a:off x="0" y="4407408"/>
+            <a:ext cx="9144000" cy="365760"/>
+          </a:xfrm>
+          <a:prstGeom prst="rect">
+            <a:avLst/>
+          </a:prstGeom>
+          <a:noFill/>
+          <a:ln/>
+        </p:spPr>
+        <p:txBody>
+          <a:bodyPr wrap="square" lIns="0" tIns="0" rIns="0" bIns="0" rtlCol="0" anchor="t"/>
+          <a:lstStyle/>
+          <a:p>
+            <a:pPr algn="ctr" indent="0" marL="0">
+              <a:buNone/>
+            </a:pPr>
+            <a:r>
+              <a:rPr lang="en-US" sz="2000" b="1" dirty="0">
+                <a:solidFill>
+                  <a:srgbClr val="FFFFFF"/>
+                </a:solidFill>
+                <a:latin typeface="Calibri" pitchFamily="34" charset="0"/>
+                <a:ea typeface="Calibri" pitchFamily="34" charset="-122"/>
+                <a:cs typeface="Calibri" pitchFamily="34" charset="-120"/>
+              </a:rPr>
+              <a:t>levalnik0.github.io/proekt-eho</a:t>
+            </a:r>
+            <a:endParaRPr lang="en-US" sz="2000" dirty="0"/>
           </a:p>
         </p:txBody>
       </p:sp>
@@ -3533,7 +3763,7 @@
         </p:nvSpPr>
         <p:spPr>
           <a:xfrm>
-            <a:off x="502920" y="219456"/>
+            <a:off x="502920" y="256032"/>
             <a:ext cx="8138160" cy="219456"/>
           </a:xfrm>
           <a:prstGeom prst="rect">
@@ -3543,7 +3773,7 @@
           <a:ln/>
         </p:spPr>
         <p:txBody>
-          <a:bodyPr wrap="square" lIns="0" tIns="0" rIns="0" bIns="0" rtlCol="0" anchor="ctr"/>
+          <a:bodyPr wrap="square" lIns="0" tIns="0" rIns="0" bIns="0" rtlCol="0" anchor="t"/>
           <a:lstStyle/>
           <a:p>
             <a:pPr indent="0" marL="0">
@@ -3558,7 +3788,7 @@
                 <a:ea typeface="Calibri" pitchFamily="34" charset="-122"/>
                 <a:cs typeface="Calibri" pitchFamily="34" charset="-120"/>
               </a:rPr>
-              <a:t>ПРОБЛЕМНОЕ ПОЛЕ</a:t>
+              <a:t>ПРОБЛЕМНОЕ ПОЛЕ, ОТ 10 ДО 12 ЛЕТ</a:t>
             </a:r>
             <a:endParaRPr lang="en-US" sz="1100" dirty="0"/>
           </a:p>
@@ -3572,17 +3802,17 @@
         </p:nvSpPr>
         <p:spPr>
           <a:xfrm>
-            <a:off x="502920" y="384048"/>
-            <a:ext cx="8138160" cy="621792"/>
-          </a:xfrm>
-          <a:prstGeom prst="rect">
-            <a:avLst/>
-          </a:prstGeom>
-          <a:noFill/>
-          <a:ln/>
-        </p:spPr>
-        <p:txBody>
-          <a:bodyPr wrap="square" lIns="0" tIns="0" rIns="0" bIns="0" rtlCol="0" anchor="ctr"/>
+            <a:off x="502920" y="457200"/>
+            <a:ext cx="8138160" cy="603504"/>
+          </a:xfrm>
+          <a:prstGeom prst="rect">
+            <a:avLst/>
+          </a:prstGeom>
+          <a:noFill/>
+          <a:ln/>
+        </p:spPr>
+        <p:txBody>
+          <a:bodyPr wrap="square" lIns="0" tIns="0" rIns="0" bIns="0" rtlCol="0" anchor="t"/>
           <a:lstStyle/>
           <a:p>
             <a:pPr indent="0" marL="0">
@@ -3597,7 +3827,7 @@
                 <a:ea typeface="Cambria" pitchFamily="34" charset="-122"/>
                 <a:cs typeface="Cambria" pitchFamily="34" charset="-120"/>
               </a:rPr>
-              <a:t>Что происходит в 10–12 лет</a:t>
+              <a:t>Что происходит в этом возрасте</a:t>
             </a:r>
             <a:endParaRPr lang="en-US" sz="3200" dirty="0"/>
           </a:p>
@@ -3611,12 +3841,12 @@
         </p:nvSpPr>
         <p:spPr>
           <a:xfrm>
-            <a:off x="502920" y="1481328"/>
-            <a:ext cx="2560320" cy="1600200"/>
+            <a:off x="502920" y="1188720"/>
+            <a:ext cx="2560320" cy="1828800"/>
           </a:xfrm>
           <a:prstGeom prst="roundRect">
             <a:avLst>
-              <a:gd name="adj" fmla="val 8000"/>
+              <a:gd name="adj" fmla="val 7000"/>
             </a:avLst>
           </a:prstGeom>
           <a:solidFill>
@@ -3645,7 +3875,7 @@
         </p:nvSpPr>
         <p:spPr>
           <a:xfrm>
-            <a:off x="777240" y="1773936"/>
+            <a:off x="777240" y="1463040"/>
             <a:ext cx="118872" cy="118872"/>
           </a:xfrm>
           <a:prstGeom prst="ellipse">
@@ -3670,7 +3900,7 @@
         </p:nvSpPr>
         <p:spPr>
           <a:xfrm>
-            <a:off x="777240" y="1975104"/>
+            <a:off x="777240" y="1682496"/>
             <a:ext cx="2048256" cy="292608"/>
           </a:xfrm>
           <a:prstGeom prst="rect">
@@ -3680,7 +3910,7 @@
           <a:ln/>
         </p:spPr>
         <p:txBody>
-          <a:bodyPr wrap="square" lIns="0" tIns="0" rIns="0" bIns="0" rtlCol="0" anchor="ctr"/>
+          <a:bodyPr wrap="square" lIns="0" tIns="0" rIns="0" bIns="0" rtlCol="0" anchor="t"/>
           <a:lstStyle/>
           <a:p>
             <a:pPr indent="0" marL="0">
@@ -3709,17 +3939,17 @@
         </p:nvSpPr>
         <p:spPr>
           <a:xfrm>
-            <a:off x="777240" y="2304288"/>
-            <a:ext cx="2048256" cy="658368"/>
-          </a:xfrm>
-          <a:prstGeom prst="rect">
-            <a:avLst/>
-          </a:prstGeom>
-          <a:noFill/>
-          <a:ln/>
-        </p:spPr>
-        <p:txBody>
-          <a:bodyPr wrap="square" lIns="0" tIns="0" rIns="0" bIns="0" rtlCol="0" anchor="ctr"/>
+            <a:off x="777240" y="2029968"/>
+            <a:ext cx="2048256" cy="859536"/>
+          </a:xfrm>
+          <a:prstGeom prst="rect">
+            <a:avLst/>
+          </a:prstGeom>
+          <a:noFill/>
+          <a:ln/>
+        </p:spPr>
+        <p:txBody>
+          <a:bodyPr wrap="square" lIns="0" tIns="0" rIns="0" bIns="0" rtlCol="0" anchor="t"/>
           <a:lstStyle/>
           <a:p>
             <a:pPr indent="0" marL="0">
@@ -3751,12 +3981,12 @@
         </p:nvSpPr>
         <p:spPr>
           <a:xfrm>
-            <a:off x="3291840" y="1481328"/>
-            <a:ext cx="2560320" cy="1600200"/>
+            <a:off x="3291840" y="1188720"/>
+            <a:ext cx="2560320" cy="1828800"/>
           </a:xfrm>
           <a:prstGeom prst="roundRect">
             <a:avLst>
-              <a:gd name="adj" fmla="val 8000"/>
+              <a:gd name="adj" fmla="val 7000"/>
             </a:avLst>
           </a:prstGeom>
           <a:solidFill>
@@ -3785,7 +4015,7 @@
         </p:nvSpPr>
         <p:spPr>
           <a:xfrm>
-            <a:off x="3566160" y="1773936"/>
+            <a:off x="3566160" y="1463040"/>
             <a:ext cx="118872" cy="118872"/>
           </a:xfrm>
           <a:prstGeom prst="ellipse">
@@ -3810,7 +4040,7 @@
         </p:nvSpPr>
         <p:spPr>
           <a:xfrm>
-            <a:off x="3566160" y="1975104"/>
+            <a:off x="3566160" y="1682496"/>
             <a:ext cx="2048256" cy="292608"/>
           </a:xfrm>
           <a:prstGeom prst="rect">
@@ -3820,7 +4050,7 @@
           <a:ln/>
         </p:spPr>
         <p:txBody>
-          <a:bodyPr wrap="square" lIns="0" tIns="0" rIns="0" bIns="0" rtlCol="0" anchor="ctr"/>
+          <a:bodyPr wrap="square" lIns="0" tIns="0" rIns="0" bIns="0" rtlCol="0" anchor="t"/>
           <a:lstStyle/>
           <a:p>
             <a:pPr indent="0" marL="0">
@@ -3849,17 +4079,17 @@
         </p:nvSpPr>
         <p:spPr>
           <a:xfrm>
-            <a:off x="3566160" y="2304288"/>
-            <a:ext cx="2048256" cy="658368"/>
-          </a:xfrm>
-          <a:prstGeom prst="rect">
-            <a:avLst/>
-          </a:prstGeom>
-          <a:noFill/>
-          <a:ln/>
-        </p:spPr>
-        <p:txBody>
-          <a:bodyPr wrap="square" lIns="0" tIns="0" rIns="0" bIns="0" rtlCol="0" anchor="ctr"/>
+            <a:off x="3566160" y="2029968"/>
+            <a:ext cx="2048256" cy="859536"/>
+          </a:xfrm>
+          <a:prstGeom prst="rect">
+            <a:avLst/>
+          </a:prstGeom>
+          <a:noFill/>
+          <a:ln/>
+        </p:spPr>
+        <p:txBody>
+          <a:bodyPr wrap="square" lIns="0" tIns="0" rIns="0" bIns="0" rtlCol="0" anchor="t"/>
           <a:lstStyle/>
           <a:p>
             <a:pPr indent="0" marL="0">
@@ -3891,12 +4121,12 @@
         </p:nvSpPr>
         <p:spPr>
           <a:xfrm>
-            <a:off x="6080760" y="1481328"/>
-            <a:ext cx="2560320" cy="1600200"/>
+            <a:off x="6080760" y="1188720"/>
+            <a:ext cx="2560320" cy="1828800"/>
           </a:xfrm>
           <a:prstGeom prst="roundRect">
             <a:avLst>
-              <a:gd name="adj" fmla="val 8000"/>
+              <a:gd name="adj" fmla="val 7000"/>
             </a:avLst>
           </a:prstGeom>
           <a:solidFill>
@@ -3925,7 +4155,7 @@
         </p:nvSpPr>
         <p:spPr>
           <a:xfrm>
-            <a:off x="6355080" y="1773936"/>
+            <a:off x="6355080" y="1463040"/>
             <a:ext cx="118872" cy="118872"/>
           </a:xfrm>
           <a:prstGeom prst="ellipse">
@@ -3950,7 +4180,7 @@
         </p:nvSpPr>
         <p:spPr>
           <a:xfrm>
-            <a:off x="6355080" y="1975104"/>
+            <a:off x="6355080" y="1682496"/>
             <a:ext cx="2048256" cy="292608"/>
           </a:xfrm>
           <a:prstGeom prst="rect">
@@ -3960,7 +4190,7 @@
           <a:ln/>
         </p:spPr>
         <p:txBody>
-          <a:bodyPr wrap="square" lIns="0" tIns="0" rIns="0" bIns="0" rtlCol="0" anchor="ctr"/>
+          <a:bodyPr wrap="square" lIns="0" tIns="0" rIns="0" bIns="0" rtlCol="0" anchor="t"/>
           <a:lstStyle/>
           <a:p>
             <a:pPr indent="0" marL="0">
@@ -3989,17 +4219,17 @@
         </p:nvSpPr>
         <p:spPr>
           <a:xfrm>
-            <a:off x="6355080" y="2304288"/>
-            <a:ext cx="2048256" cy="658368"/>
-          </a:xfrm>
-          <a:prstGeom prst="rect">
-            <a:avLst/>
-          </a:prstGeom>
-          <a:noFill/>
-          <a:ln/>
-        </p:spPr>
-        <p:txBody>
-          <a:bodyPr wrap="square" lIns="0" tIns="0" rIns="0" bIns="0" rtlCol="0" anchor="ctr"/>
+            <a:off x="6355080" y="2029968"/>
+            <a:ext cx="2048256" cy="859536"/>
+          </a:xfrm>
+          <a:prstGeom prst="rect">
+            <a:avLst/>
+          </a:prstGeom>
+          <a:noFill/>
+          <a:ln/>
+        </p:spPr>
+        <p:txBody>
+          <a:bodyPr wrap="square" lIns="0" tIns="0" rIns="0" bIns="0" rtlCol="0" anchor="t"/>
           <a:lstStyle/>
           <a:p>
             <a:pPr indent="0" marL="0">
@@ -4031,12 +4261,12 @@
         </p:nvSpPr>
         <p:spPr>
           <a:xfrm>
-            <a:off x="502920" y="3346704"/>
-            <a:ext cx="8138160" cy="1060704"/>
+            <a:off x="502920" y="3310128"/>
+            <a:ext cx="8138160" cy="1188720"/>
           </a:xfrm>
           <a:prstGeom prst="roundRect">
             <a:avLst>
-              <a:gd name="adj" fmla="val 12069"/>
+              <a:gd name="adj" fmla="val 10769"/>
             </a:avLst>
           </a:prstGeom>
           <a:solidFill>
@@ -4065,8 +4295,8 @@
         </p:nvSpPr>
         <p:spPr>
           <a:xfrm>
-            <a:off x="813816" y="3602736"/>
-            <a:ext cx="7498080" cy="566928"/>
+            <a:off x="795528" y="3310128"/>
+            <a:ext cx="7552944" cy="1188720"/>
           </a:xfrm>
           <a:prstGeom prst="rect">
             <a:avLst/>
@@ -4080,7 +4310,7 @@
           <a:p>
             <a:pPr indent="0" marL="0">
               <a:lnSpc>
-                <a:spcPts val="2400"/>
+                <a:spcPts val="2160"/>
               </a:lnSpc>
               <a:buNone/>
             </a:pPr>
@@ -4139,7 +4369,7 @@
         </p:nvSpPr>
         <p:spPr>
           <a:xfrm>
-            <a:off x="502920" y="219456"/>
+            <a:off x="502920" y="256032"/>
             <a:ext cx="8138160" cy="219456"/>
           </a:xfrm>
           <a:prstGeom prst="rect">
@@ -4149,7 +4379,7 @@
           <a:ln/>
         </p:spPr>
         <p:txBody>
-          <a:bodyPr wrap="square" lIns="0" tIns="0" rIns="0" bIns="0" rtlCol="0" anchor="ctr"/>
+          <a:bodyPr wrap="square" lIns="0" tIns="0" rIns="0" bIns="0" rtlCol="0" anchor="t"/>
           <a:lstStyle/>
           <a:p>
             <a:pPr indent="0" marL="0">
@@ -4178,17 +4408,17 @@
         </p:nvSpPr>
         <p:spPr>
           <a:xfrm>
-            <a:off x="502920" y="384048"/>
-            <a:ext cx="8138160" cy="621792"/>
-          </a:xfrm>
-          <a:prstGeom prst="rect">
-            <a:avLst/>
-          </a:prstGeom>
-          <a:noFill/>
-          <a:ln/>
-        </p:spPr>
-        <p:txBody>
-          <a:bodyPr wrap="square" lIns="0" tIns="0" rIns="0" bIns="0" rtlCol="0" anchor="ctr"/>
+            <a:off x="502920" y="457200"/>
+            <a:ext cx="8138160" cy="603504"/>
+          </a:xfrm>
+          <a:prstGeom prst="rect">
+            <a:avLst/>
+          </a:prstGeom>
+          <a:noFill/>
+          <a:ln/>
+        </p:spPr>
+        <p:txBody>
+          <a:bodyPr wrap="square" lIns="0" tIns="0" rIns="0" bIns="0" rtlCol="0" anchor="t"/>
           <a:lstStyle/>
           <a:p>
             <a:pPr indent="0" marL="0">
@@ -4217,12 +4447,12 @@
         </p:nvSpPr>
         <p:spPr>
           <a:xfrm>
-            <a:off x="502920" y="1371600"/>
-            <a:ext cx="3931920" cy="2743200"/>
+            <a:off x="502920" y="1188720"/>
+            <a:ext cx="3931920" cy="2926080"/>
           </a:xfrm>
           <a:prstGeom prst="roundRect">
             <a:avLst>
-              <a:gd name="adj" fmla="val 4667"/>
+              <a:gd name="adj" fmla="val 4375"/>
             </a:avLst>
           </a:prstGeom>
           <a:solidFill>
@@ -4251,7 +4481,7 @@
         </p:nvSpPr>
         <p:spPr>
           <a:xfrm>
-            <a:off x="795528" y="1609344"/>
+            <a:off x="795528" y="1426464"/>
             <a:ext cx="3346704" cy="329184"/>
           </a:xfrm>
           <a:prstGeom prst="rect">
@@ -4261,7 +4491,7 @@
           <a:ln/>
         </p:spPr>
         <p:txBody>
-          <a:bodyPr wrap="square" lIns="0" tIns="0" rIns="0" bIns="0" rtlCol="0" anchor="ctr"/>
+          <a:bodyPr wrap="square" lIns="0" tIns="0" rIns="0" bIns="0" rtlCol="0" anchor="t"/>
           <a:lstStyle/>
           <a:p>
             <a:pPr indent="0" marL="0">
@@ -4276,7 +4506,7 @@
                 <a:ea typeface="Cambria" pitchFamily="34" charset="-122"/>
                 <a:cs typeface="Cambria" pitchFamily="34" charset="-120"/>
               </a:rPr>
-              <a:t>Дети 10–12 лет</a:t>
+              <a:t>Дети от 10 до 12 лет</a:t>
             </a:r>
             <a:endParaRPr lang="en-US" sz="2000" dirty="0"/>
           </a:p>
@@ -4290,7 +4520,7 @@
         </p:nvSpPr>
         <p:spPr>
           <a:xfrm>
-            <a:off x="795528" y="1956816"/>
+            <a:off x="795528" y="1810512"/>
             <a:ext cx="3346704" cy="237744"/>
           </a:xfrm>
           <a:prstGeom prst="rect">
@@ -4300,7 +4530,7 @@
           <a:ln/>
         </p:spPr>
         <p:txBody>
-          <a:bodyPr wrap="square" lIns="0" tIns="0" rIns="0" bIns="0" rtlCol="0" anchor="ctr"/>
+          <a:bodyPr wrap="square" lIns="0" tIns="0" rIns="0" bIns="0" rtlCol="0" anchor="t"/>
           <a:lstStyle/>
           <a:p>
             <a:pPr indent="0" marL="0">
@@ -4315,7 +4545,7 @@
                 <a:ea typeface="Calibri" pitchFamily="34" charset="-122"/>
                 <a:cs typeface="Calibri" pitchFamily="34" charset="-120"/>
               </a:rPr>
-              <a:t>4–6 классы</a:t>
+              <a:t>с четвёртого по шестой класс</a:t>
             </a:r>
             <a:endParaRPr lang="en-US" sz="1200" dirty="0"/>
           </a:p>
@@ -4329,7 +4559,7 @@
         </p:nvSpPr>
         <p:spPr>
           <a:xfrm>
-            <a:off x="813816" y="2423160"/>
+            <a:off x="813816" y="2297938"/>
             <a:ext cx="118872" cy="118872"/>
           </a:xfrm>
           <a:prstGeom prst="ellipse">
@@ -4354,17 +4584,17 @@
         </p:nvSpPr>
         <p:spPr>
           <a:xfrm>
-            <a:off x="1033272" y="2340864"/>
-            <a:ext cx="3108960" cy="475488"/>
-          </a:xfrm>
-          <a:prstGeom prst="rect">
-            <a:avLst/>
-          </a:prstGeom>
-          <a:noFill/>
-          <a:ln/>
-        </p:spPr>
-        <p:txBody>
-          <a:bodyPr wrap="square" lIns="0" tIns="0" rIns="0" bIns="0" rtlCol="0" anchor="ctr"/>
+            <a:off x="1033272" y="2249424"/>
+            <a:ext cx="3108960" cy="219456"/>
+          </a:xfrm>
+          <a:prstGeom prst="rect">
+            <a:avLst/>
+          </a:prstGeom>
+          <a:noFill/>
+          <a:ln/>
+        </p:spPr>
+        <p:txBody>
+          <a:bodyPr wrap="square" lIns="0" tIns="0" rIns="0" bIns="0" rtlCol="0" anchor="t"/>
           <a:lstStyle/>
           <a:p>
             <a:pPr indent="0" marL="0">
@@ -4382,7 +4612,7 @@
                 <a:ea typeface="Calibri" pitchFamily="34" charset="-122"/>
                 <a:cs typeface="Calibri" pitchFamily="34" charset="-120"/>
               </a:rPr>
-              <a:t>Roblox, Minecraft, мессенджеры, короткие видео</a:t>
+              <a:t>Roblox, Minecraft, мессенджеры, видео</a:t>
             </a:r>
             <a:endParaRPr lang="en-US" sz="1300" dirty="0"/>
           </a:p>
@@ -4396,7 +4626,7 @@
         </p:nvSpPr>
         <p:spPr>
           <a:xfrm>
-            <a:off x="813816" y="2971800"/>
+            <a:off x="813816" y="2974594"/>
             <a:ext cx="118872" cy="118872"/>
           </a:xfrm>
           <a:prstGeom prst="ellipse">
@@ -4421,17 +4651,17 @@
         </p:nvSpPr>
         <p:spPr>
           <a:xfrm>
-            <a:off x="1033272" y="2889504"/>
-            <a:ext cx="3108960" cy="475488"/>
-          </a:xfrm>
-          <a:prstGeom prst="rect">
-            <a:avLst/>
-          </a:prstGeom>
-          <a:noFill/>
-          <a:ln/>
-        </p:spPr>
-        <p:txBody>
-          <a:bodyPr wrap="square" lIns="0" tIns="0" rIns="0" bIns="0" rtlCol="0" anchor="ctr"/>
+            <a:off x="1033272" y="2926080"/>
+            <a:ext cx="3108960" cy="219456"/>
+          </a:xfrm>
+          <a:prstGeom prst="rect">
+            <a:avLst/>
+          </a:prstGeom>
+          <a:noFill/>
+          <a:ln/>
+        </p:spPr>
+        <p:txBody>
+          <a:bodyPr wrap="square" lIns="0" tIns="0" rIns="0" bIns="0" rtlCol="0" anchor="t"/>
           <a:lstStyle/>
           <a:p>
             <a:pPr indent="0" marL="0">
@@ -4449,7 +4679,7 @@
                 <a:ea typeface="Calibri" pitchFamily="34" charset="-122"/>
                 <a:cs typeface="Calibri" pitchFamily="34" charset="-120"/>
               </a:rPr>
-              <a:t>Спешка, лесть и подначки работают безотказно</a:t>
+              <a:t>Лесть и спешка работают безотказно</a:t>
             </a:r>
             <a:endParaRPr lang="en-US" sz="1300" dirty="0"/>
           </a:p>
@@ -4463,7 +4693,7 @@
         </p:nvSpPr>
         <p:spPr>
           <a:xfrm>
-            <a:off x="813816" y="3520440"/>
+            <a:off x="813816" y="3651250"/>
             <a:ext cx="118872" cy="118872"/>
           </a:xfrm>
           <a:prstGeom prst="ellipse">
@@ -4488,17 +4718,17 @@
         </p:nvSpPr>
         <p:spPr>
           <a:xfrm>
-            <a:off x="1033272" y="3438144"/>
-            <a:ext cx="3108960" cy="475488"/>
-          </a:xfrm>
-          <a:prstGeom prst="rect">
-            <a:avLst/>
-          </a:prstGeom>
-          <a:noFill/>
-          <a:ln/>
-        </p:spPr>
-        <p:txBody>
-          <a:bodyPr wrap="square" lIns="0" tIns="0" rIns="0" bIns="0" rtlCol="0" anchor="ctr"/>
+            <a:off x="1033272" y="3602736"/>
+            <a:ext cx="3108960" cy="219456"/>
+          </a:xfrm>
+          <a:prstGeom prst="rect">
+            <a:avLst/>
+          </a:prstGeom>
+          <a:noFill/>
+          <a:ln/>
+        </p:spPr>
+        <p:txBody>
+          <a:bodyPr wrap="square" lIns="0" tIns="0" rIns="0" bIns="0" rtlCol="0" anchor="t"/>
           <a:lstStyle/>
           <a:p>
             <a:pPr indent="0" marL="0">
@@ -4516,7 +4746,7 @@
                 <a:ea typeface="Calibri" pitchFamily="34" charset="-122"/>
                 <a:cs typeface="Calibri" pitchFamily="34" charset="-120"/>
               </a:rPr>
-              <a:t>Со спорным вопросом идут к друзьям, не к родителям</a:t>
+              <a:t>Со спорным вопросом идут к друзьям</a:t>
             </a:r>
             <a:endParaRPr lang="en-US" sz="1300" dirty="0"/>
           </a:p>
@@ -4530,12 +4760,12 @@
         </p:nvSpPr>
         <p:spPr>
           <a:xfrm>
-            <a:off x="4709160" y="1371600"/>
-            <a:ext cx="3931920" cy="2743200"/>
+            <a:off x="4709160" y="1188720"/>
+            <a:ext cx="3931920" cy="2926080"/>
           </a:xfrm>
           <a:prstGeom prst="roundRect">
             <a:avLst>
-              <a:gd name="adj" fmla="val 4667"/>
+              <a:gd name="adj" fmla="val 4375"/>
             </a:avLst>
           </a:prstGeom>
           <a:solidFill>
@@ -4564,7 +4794,7 @@
         </p:nvSpPr>
         <p:spPr>
           <a:xfrm>
-            <a:off x="5001768" y="1609344"/>
+            <a:off x="5001768" y="1426464"/>
             <a:ext cx="3346704" cy="329184"/>
           </a:xfrm>
           <a:prstGeom prst="rect">
@@ -4574,7 +4804,7 @@
           <a:ln/>
         </p:spPr>
         <p:txBody>
-          <a:bodyPr wrap="square" lIns="0" tIns="0" rIns="0" bIns="0" rtlCol="0" anchor="ctr"/>
+          <a:bodyPr wrap="square" lIns="0" tIns="0" rIns="0" bIns="0" rtlCol="0" anchor="t"/>
           <a:lstStyle/>
           <a:p>
             <a:pPr indent="0" marL="0">
@@ -4603,7 +4833,7 @@
         </p:nvSpPr>
         <p:spPr>
           <a:xfrm>
-            <a:off x="5001768" y="1956816"/>
+            <a:off x="5001768" y="1810512"/>
             <a:ext cx="3346704" cy="237744"/>
           </a:xfrm>
           <a:prstGeom prst="rect">
@@ -4613,7 +4843,7 @@
           <a:ln/>
         </p:spPr>
         <p:txBody>
-          <a:bodyPr wrap="square" lIns="0" tIns="0" rIns="0" bIns="0" rtlCol="0" anchor="ctr"/>
+          <a:bodyPr wrap="square" lIns="0" tIns="0" rIns="0" bIns="0" rtlCol="0" anchor="t"/>
           <a:lstStyle/>
           <a:p>
             <a:pPr indent="0" marL="0">
@@ -4642,7 +4872,7 @@
         </p:nvSpPr>
         <p:spPr>
           <a:xfrm>
-            <a:off x="5020056" y="2423160"/>
+            <a:off x="5020056" y="2297938"/>
             <a:ext cx="118872" cy="118872"/>
           </a:xfrm>
           <a:prstGeom prst="ellipse">
@@ -4667,17 +4897,17 @@
         </p:nvSpPr>
         <p:spPr>
           <a:xfrm>
-            <a:off x="5239512" y="2340864"/>
-            <a:ext cx="3108960" cy="475488"/>
-          </a:xfrm>
-          <a:prstGeom prst="rect">
-            <a:avLst/>
-          </a:prstGeom>
-          <a:noFill/>
-          <a:ln/>
-        </p:spPr>
-        <p:txBody>
-          <a:bodyPr wrap="square" lIns="0" tIns="0" rIns="0" bIns="0" rtlCol="0" anchor="ctr"/>
+            <a:off x="5239512" y="2249424"/>
+            <a:ext cx="3108960" cy="219456"/>
+          </a:xfrm>
+          <a:prstGeom prst="rect">
+            <a:avLst/>
+          </a:prstGeom>
+          <a:noFill/>
+          <a:ln/>
+        </p:spPr>
+        <p:txBody>
+          <a:bodyPr wrap="square" lIns="0" tIns="0" rIns="0" bIns="0" rtlCol="0" anchor="t"/>
           <a:lstStyle/>
           <a:p>
             <a:pPr indent="0" marL="0">
@@ -4695,7 +4925,7 @@
                 <a:ea typeface="Calibri" pitchFamily="34" charset="-122"/>
                 <a:cs typeface="Calibri" pitchFamily="34" charset="-120"/>
               </a:rPr>
-              <a:t>Видят, что ребёнок изменился, но не знают, с чего начать</a:t>
+              <a:t>Видят перемены и не знают, что делать</a:t>
             </a:r>
             <a:endParaRPr lang="en-US" sz="1300" dirty="0"/>
           </a:p>
@@ -4709,7 +4939,7 @@
         </p:nvSpPr>
         <p:spPr>
           <a:xfrm>
-            <a:off x="5020056" y="2971800"/>
+            <a:off x="5020056" y="2974594"/>
             <a:ext cx="118872" cy="118872"/>
           </a:xfrm>
           <a:prstGeom prst="ellipse">
@@ -4734,17 +4964,17 @@
         </p:nvSpPr>
         <p:spPr>
           <a:xfrm>
-            <a:off x="5239512" y="2889504"/>
-            <a:ext cx="3108960" cy="475488"/>
-          </a:xfrm>
-          <a:prstGeom prst="rect">
-            <a:avLst/>
-          </a:prstGeom>
-          <a:noFill/>
-          <a:ln/>
-        </p:spPr>
-        <p:txBody>
-          <a:bodyPr wrap="square" lIns="0" tIns="0" rIns="0" bIns="0" rtlCol="0" anchor="ctr"/>
+            <a:off x="5239512" y="2926080"/>
+            <a:ext cx="3108960" cy="219456"/>
+          </a:xfrm>
+          <a:prstGeom prst="rect">
+            <a:avLst/>
+          </a:prstGeom>
+          <a:noFill/>
+          <a:ln/>
+        </p:spPr>
+        <p:txBody>
+          <a:bodyPr wrap="square" lIns="0" tIns="0" rIns="0" bIns="0" rtlCol="0" anchor="t"/>
           <a:lstStyle/>
           <a:p>
             <a:pPr indent="0" marL="0">
@@ -4776,7 +5006,7 @@
         </p:nvSpPr>
         <p:spPr>
           <a:xfrm>
-            <a:off x="5020056" y="3520440"/>
+            <a:off x="5020056" y="3651250"/>
             <a:ext cx="118872" cy="118872"/>
           </a:xfrm>
           <a:prstGeom prst="ellipse">
@@ -4801,17 +5031,17 @@
         </p:nvSpPr>
         <p:spPr>
           <a:xfrm>
-            <a:off x="5239512" y="3438144"/>
-            <a:ext cx="3108960" cy="475488"/>
-          </a:xfrm>
-          <a:prstGeom prst="rect">
-            <a:avLst/>
-          </a:prstGeom>
-          <a:noFill/>
-          <a:ln/>
-        </p:spPr>
-        <p:txBody>
-          <a:bodyPr wrap="square" lIns="0" tIns="0" rIns="0" bIns="0" rtlCol="0" anchor="ctr"/>
+            <a:off x="5239512" y="3602736"/>
+            <a:ext cx="3108960" cy="219456"/>
+          </a:xfrm>
+          <a:prstGeom prst="rect">
+            <a:avLst/>
+          </a:prstGeom>
+          <a:noFill/>
+          <a:ln/>
+        </p:spPr>
+        <p:txBody>
+          <a:bodyPr wrap="square" lIns="0" tIns="0" rIns="0" bIns="0" rtlCol="0" anchor="t"/>
           <a:lstStyle/>
           <a:p>
             <a:pPr indent="0" marL="0">
@@ -4829,7 +5059,7 @@
                 <a:ea typeface="Calibri" pitchFamily="34" charset="-122"/>
                 <a:cs typeface="Calibri" pitchFamily="34" charset="-120"/>
               </a:rPr>
-              <a:t>Готовых слов для такого разговора нет</a:t>
+              <a:t>Готовых слов для разговора нет</a:t>
             </a:r>
             <a:endParaRPr lang="en-US" sz="1300" dirty="0"/>
           </a:p>
@@ -4843,17 +5073,17 @@
         </p:nvSpPr>
         <p:spPr>
           <a:xfrm>
-            <a:off x="502920" y="4315968"/>
-            <a:ext cx="8138160" cy="329184"/>
-          </a:xfrm>
-          <a:prstGeom prst="rect">
-            <a:avLst/>
-          </a:prstGeom>
-          <a:noFill/>
-          <a:ln/>
-        </p:spPr>
-        <p:txBody>
-          <a:bodyPr wrap="square" lIns="0" tIns="0" rIns="0" bIns="0" rtlCol="0" anchor="ctr"/>
+            <a:off x="502920" y="4279392"/>
+            <a:ext cx="8138160" cy="310896"/>
+          </a:xfrm>
+          <a:prstGeom prst="rect">
+            <a:avLst/>
+          </a:prstGeom>
+          <a:noFill/>
+          <a:ln/>
+        </p:spPr>
+        <p:txBody>
+          <a:bodyPr wrap="square" lIns="0" tIns="0" rIns="0" bIns="0" rtlCol="0" anchor="t"/>
           <a:lstStyle/>
           <a:p>
             <a:pPr indent="0" marL="0">
@@ -4868,7 +5098,7 @@
                 <a:ea typeface="Calibri" pitchFamily="34" charset="-122"/>
                 <a:cs typeface="Calibri" pitchFamily="34" charset="-120"/>
               </a:rPr>
-              <a:t>Приложение говорит с обеими сторонами по отдельности — и потом сводит их вместе.</a:t>
+              <a:t>Приложение говорит с каждой стороной отдельно, а потом сводит их вместе.</a:t>
             </a:r>
             <a:endParaRPr lang="en-US" sz="1300" dirty="0"/>
           </a:p>
@@ -4914,7 +5144,7 @@
         </p:nvSpPr>
         <p:spPr>
           <a:xfrm>
-            <a:off x="502920" y="219456"/>
+            <a:off x="502920" y="256032"/>
             <a:ext cx="8138160" cy="219456"/>
           </a:xfrm>
           <a:prstGeom prst="rect">
@@ -4924,7 +5154,7 @@
           <a:ln/>
         </p:spPr>
         <p:txBody>
-          <a:bodyPr wrap="square" lIns="0" tIns="0" rIns="0" bIns="0" rtlCol="0" anchor="ctr"/>
+          <a:bodyPr wrap="square" lIns="0" tIns="0" rIns="0" bIns="0" rtlCol="0" anchor="t"/>
           <a:lstStyle/>
           <a:p>
             <a:pPr indent="0" marL="0">
@@ -4953,17 +5183,17 @@
         </p:nvSpPr>
         <p:spPr>
           <a:xfrm>
-            <a:off x="502920" y="384048"/>
-            <a:ext cx="8138160" cy="621792"/>
-          </a:xfrm>
-          <a:prstGeom prst="rect">
-            <a:avLst/>
-          </a:prstGeom>
-          <a:noFill/>
-          <a:ln/>
-        </p:spPr>
-        <p:txBody>
-          <a:bodyPr wrap="square" lIns="0" tIns="0" rIns="0" bIns="0" rtlCol="0" anchor="ctr"/>
+            <a:off x="502920" y="457200"/>
+            <a:ext cx="8138160" cy="603504"/>
+          </a:xfrm>
+          <a:prstGeom prst="rect">
+            <a:avLst/>
+          </a:prstGeom>
+          <a:noFill/>
+          <a:ln/>
+        </p:spPr>
+        <p:txBody>
+          <a:bodyPr wrap="square" lIns="0" tIns="0" rIns="0" bIns="0" rtlCol="0" anchor="t"/>
           <a:lstStyle/>
           <a:p>
             <a:pPr indent="0" marL="0">
@@ -5000,8 +5230,8 @@
         </p:blipFill>
         <p:spPr>
           <a:xfrm>
-            <a:off x="502920" y="1280160"/>
-            <a:ext cx="1801368" cy="3520440"/>
+            <a:off x="502920" y="1188720"/>
+            <a:ext cx="1727632" cy="3383280"/>
           </a:xfrm>
           <a:prstGeom prst="rect">
             <a:avLst/>
@@ -5016,12 +5246,12 @@
         </p:nvSpPr>
         <p:spPr>
           <a:xfrm>
-            <a:off x="2606040" y="1298448"/>
-            <a:ext cx="6035040" cy="585216"/>
+            <a:off x="2606040" y="1188720"/>
+            <a:ext cx="6035040" cy="603504"/>
           </a:xfrm>
           <a:prstGeom prst="roundRect">
             <a:avLst>
-              <a:gd name="adj" fmla="val 21875"/>
+              <a:gd name="adj" fmla="val 21212"/>
             </a:avLst>
           </a:prstGeom>
           <a:solidFill>
@@ -5050,7 +5280,7 @@
         </p:nvSpPr>
         <p:spPr>
           <a:xfrm>
-            <a:off x="2834640" y="1536192"/>
+            <a:off x="2834640" y="1327404"/>
             <a:ext cx="118872" cy="118872"/>
           </a:xfrm>
           <a:prstGeom prst="ellipse">
@@ -5075,17 +5305,17 @@
         </p:nvSpPr>
         <p:spPr>
           <a:xfrm>
-            <a:off x="3127248" y="1371600"/>
-            <a:ext cx="2377440" cy="274320"/>
-          </a:xfrm>
-          <a:prstGeom prst="rect">
-            <a:avLst/>
-          </a:prstGeom>
-          <a:noFill/>
-          <a:ln/>
-        </p:spPr>
-        <p:txBody>
-          <a:bodyPr wrap="square" lIns="0" tIns="0" rIns="0" bIns="0" rtlCol="0" anchor="ctr"/>
+            <a:off x="3127248" y="1280160"/>
+            <a:ext cx="2377440" cy="237744"/>
+          </a:xfrm>
+          <a:prstGeom prst="rect">
+            <a:avLst/>
+          </a:prstGeom>
+          <a:noFill/>
+          <a:ln/>
+        </p:spPr>
+        <p:txBody>
+          <a:bodyPr wrap="square" lIns="0" tIns="0" rIns="0" bIns="0" rtlCol="0" anchor="t"/>
           <a:lstStyle/>
           <a:p>
             <a:pPr indent="0" marL="0">
@@ -5114,17 +5344,17 @@
         </p:nvSpPr>
         <p:spPr>
           <a:xfrm>
-            <a:off x="3127248" y="1609344"/>
-            <a:ext cx="5303520" cy="237744"/>
-          </a:xfrm>
-          <a:prstGeom prst="rect">
-            <a:avLst/>
-          </a:prstGeom>
-          <a:noFill/>
-          <a:ln/>
-        </p:spPr>
-        <p:txBody>
-          <a:bodyPr wrap="square" lIns="0" tIns="0" rIns="0" bIns="0" rtlCol="0" anchor="ctr"/>
+            <a:off x="3127248" y="1517904"/>
+            <a:ext cx="5303520" cy="219456"/>
+          </a:xfrm>
+          <a:prstGeom prst="rect">
+            <a:avLst/>
+          </a:prstGeom>
+          <a:noFill/>
+          <a:ln/>
+        </p:spPr>
+        <p:txBody>
+          <a:bodyPr wrap="square" lIns="0" tIns="0" rIns="0" bIns="0" rtlCol="0" anchor="t"/>
           <a:lstStyle/>
           <a:p>
             <a:pPr indent="0" marL="0">
@@ -5153,12 +5383,12 @@
         </p:nvSpPr>
         <p:spPr>
           <a:xfrm>
-            <a:off x="2606040" y="1993392"/>
-            <a:ext cx="6035040" cy="585216"/>
+            <a:off x="2606040" y="1883664"/>
+            <a:ext cx="6035040" cy="603504"/>
           </a:xfrm>
           <a:prstGeom prst="roundRect">
             <a:avLst>
-              <a:gd name="adj" fmla="val 21875"/>
+              <a:gd name="adj" fmla="val 21212"/>
             </a:avLst>
           </a:prstGeom>
           <a:solidFill>
@@ -5187,7 +5417,7 @@
         </p:nvSpPr>
         <p:spPr>
           <a:xfrm>
-            <a:off x="2834640" y="2231136"/>
+            <a:off x="2834640" y="2022348"/>
             <a:ext cx="118872" cy="118872"/>
           </a:xfrm>
           <a:prstGeom prst="ellipse">
@@ -5212,17 +5442,17 @@
         </p:nvSpPr>
         <p:spPr>
           <a:xfrm>
-            <a:off x="3127248" y="2066544"/>
-            <a:ext cx="2377440" cy="274320"/>
-          </a:xfrm>
-          <a:prstGeom prst="rect">
-            <a:avLst/>
-          </a:prstGeom>
-          <a:noFill/>
-          <a:ln/>
-        </p:spPr>
-        <p:txBody>
-          <a:bodyPr wrap="square" lIns="0" tIns="0" rIns="0" bIns="0" rtlCol="0" anchor="ctr"/>
+            <a:off x="3127248" y="1975104"/>
+            <a:ext cx="2377440" cy="237744"/>
+          </a:xfrm>
+          <a:prstGeom prst="rect">
+            <a:avLst/>
+          </a:prstGeom>
+          <a:noFill/>
+          <a:ln/>
+        </p:spPr>
+        <p:txBody>
+          <a:bodyPr wrap="square" lIns="0" tIns="0" rIns="0" bIns="0" rtlCol="0" anchor="t"/>
           <a:lstStyle/>
           <a:p>
             <a:pPr indent="0" marL="0">
@@ -5251,17 +5481,17 @@
         </p:nvSpPr>
         <p:spPr>
           <a:xfrm>
-            <a:off x="3127248" y="2304288"/>
-            <a:ext cx="5303520" cy="237744"/>
-          </a:xfrm>
-          <a:prstGeom prst="rect">
-            <a:avLst/>
-          </a:prstGeom>
-          <a:noFill/>
-          <a:ln/>
-        </p:spPr>
-        <p:txBody>
-          <a:bodyPr wrap="square" lIns="0" tIns="0" rIns="0" bIns="0" rtlCol="0" anchor="ctr"/>
+            <a:off x="3127248" y="2212848"/>
+            <a:ext cx="5303520" cy="219456"/>
+          </a:xfrm>
+          <a:prstGeom prst="rect">
+            <a:avLst/>
+          </a:prstGeom>
+          <a:noFill/>
+          <a:ln/>
+        </p:spPr>
+        <p:txBody>
+          <a:bodyPr wrap="square" lIns="0" tIns="0" rIns="0" bIns="0" rtlCol="0" anchor="t"/>
           <a:lstStyle/>
           <a:p>
             <a:pPr indent="0" marL="0">
@@ -5290,12 +5520,12 @@
         </p:nvSpPr>
         <p:spPr>
           <a:xfrm>
-            <a:off x="2606040" y="2688336"/>
-            <a:ext cx="6035040" cy="585216"/>
+            <a:off x="2606040" y="2578608"/>
+            <a:ext cx="6035040" cy="603504"/>
           </a:xfrm>
           <a:prstGeom prst="roundRect">
             <a:avLst>
-              <a:gd name="adj" fmla="val 21875"/>
+              <a:gd name="adj" fmla="val 21212"/>
             </a:avLst>
           </a:prstGeom>
           <a:solidFill>
@@ -5324,7 +5554,7 @@
         </p:nvSpPr>
         <p:spPr>
           <a:xfrm>
-            <a:off x="2834640" y="2926080"/>
+            <a:off x="2834640" y="2717292"/>
             <a:ext cx="118872" cy="118872"/>
           </a:xfrm>
           <a:prstGeom prst="ellipse">
@@ -5349,17 +5579,17 @@
         </p:nvSpPr>
         <p:spPr>
           <a:xfrm>
-            <a:off x="3127248" y="2761488"/>
-            <a:ext cx="2377440" cy="274320"/>
-          </a:xfrm>
-          <a:prstGeom prst="rect">
-            <a:avLst/>
-          </a:prstGeom>
-          <a:noFill/>
-          <a:ln/>
-        </p:spPr>
-        <p:txBody>
-          <a:bodyPr wrap="square" lIns="0" tIns="0" rIns="0" bIns="0" rtlCol="0" anchor="ctr"/>
+            <a:off x="3127248" y="2670048"/>
+            <a:ext cx="2377440" cy="237744"/>
+          </a:xfrm>
+          <a:prstGeom prst="rect">
+            <a:avLst/>
+          </a:prstGeom>
+          <a:noFill/>
+          <a:ln/>
+        </p:spPr>
+        <p:txBody>
+          <a:bodyPr wrap="square" lIns="0" tIns="0" rIns="0" bIns="0" rtlCol="0" anchor="t"/>
           <a:lstStyle/>
           <a:p>
             <a:pPr indent="0" marL="0">
@@ -5388,17 +5618,17 @@
         </p:nvSpPr>
         <p:spPr>
           <a:xfrm>
-            <a:off x="3127248" y="2999232"/>
-            <a:ext cx="5303520" cy="237744"/>
-          </a:xfrm>
-          <a:prstGeom prst="rect">
-            <a:avLst/>
-          </a:prstGeom>
-          <a:noFill/>
-          <a:ln/>
-        </p:spPr>
-        <p:txBody>
-          <a:bodyPr wrap="square" lIns="0" tIns="0" rIns="0" bIns="0" rtlCol="0" anchor="ctr"/>
+            <a:off x="3127248" y="2907792"/>
+            <a:ext cx="5303520" cy="219456"/>
+          </a:xfrm>
+          <a:prstGeom prst="rect">
+            <a:avLst/>
+          </a:prstGeom>
+          <a:noFill/>
+          <a:ln/>
+        </p:spPr>
+        <p:txBody>
+          <a:bodyPr wrap="square" lIns="0" tIns="0" rIns="0" bIns="0" rtlCol="0" anchor="t"/>
           <a:lstStyle/>
           <a:p>
             <a:pPr indent="0" marL="0">
@@ -5427,12 +5657,12 @@
         </p:nvSpPr>
         <p:spPr>
           <a:xfrm>
-            <a:off x="2606040" y="3383280"/>
-            <a:ext cx="6035040" cy="585216"/>
+            <a:off x="2606040" y="3273552"/>
+            <a:ext cx="6035040" cy="603504"/>
           </a:xfrm>
           <a:prstGeom prst="roundRect">
             <a:avLst>
-              <a:gd name="adj" fmla="val 21875"/>
+              <a:gd name="adj" fmla="val 21212"/>
             </a:avLst>
           </a:prstGeom>
           <a:solidFill>
@@ -5461,7 +5691,7 @@
         </p:nvSpPr>
         <p:spPr>
           <a:xfrm>
-            <a:off x="2834640" y="3621024"/>
+            <a:off x="2834640" y="3412236"/>
             <a:ext cx="118872" cy="118872"/>
           </a:xfrm>
           <a:prstGeom prst="ellipse">
@@ -5486,17 +5716,17 @@
         </p:nvSpPr>
         <p:spPr>
           <a:xfrm>
-            <a:off x="3127248" y="3456432"/>
-            <a:ext cx="2377440" cy="274320"/>
-          </a:xfrm>
-          <a:prstGeom prst="rect">
-            <a:avLst/>
-          </a:prstGeom>
-          <a:noFill/>
-          <a:ln/>
-        </p:spPr>
-        <p:txBody>
-          <a:bodyPr wrap="square" lIns="0" tIns="0" rIns="0" bIns="0" rtlCol="0" anchor="ctr"/>
+            <a:off x="3127248" y="3364992"/>
+            <a:ext cx="2377440" cy="237744"/>
+          </a:xfrm>
+          <a:prstGeom prst="rect">
+            <a:avLst/>
+          </a:prstGeom>
+          <a:noFill/>
+          <a:ln/>
+        </p:spPr>
+        <p:txBody>
+          <a:bodyPr wrap="square" lIns="0" tIns="0" rIns="0" bIns="0" rtlCol="0" anchor="t"/>
           <a:lstStyle/>
           <a:p>
             <a:pPr indent="0" marL="0">
@@ -5525,17 +5755,17 @@
         </p:nvSpPr>
         <p:spPr>
           <a:xfrm>
-            <a:off x="3127248" y="3694176"/>
-            <a:ext cx="5303520" cy="237744"/>
-          </a:xfrm>
-          <a:prstGeom prst="rect">
-            <a:avLst/>
-          </a:prstGeom>
-          <a:noFill/>
-          <a:ln/>
-        </p:spPr>
-        <p:txBody>
-          <a:bodyPr wrap="square" lIns="0" tIns="0" rIns="0" bIns="0" rtlCol="0" anchor="ctr"/>
+            <a:off x="3127248" y="3602736"/>
+            <a:ext cx="5303520" cy="219456"/>
+          </a:xfrm>
+          <a:prstGeom prst="rect">
+            <a:avLst/>
+          </a:prstGeom>
+          <a:noFill/>
+          <a:ln/>
+        </p:spPr>
+        <p:txBody>
+          <a:bodyPr wrap="square" lIns="0" tIns="0" rIns="0" bIns="0" rtlCol="0" anchor="t"/>
           <a:lstStyle/>
           <a:p>
             <a:pPr indent="0" marL="0">
@@ -5564,12 +5794,12 @@
         </p:nvSpPr>
         <p:spPr>
           <a:xfrm>
-            <a:off x="2606040" y="4078224"/>
-            <a:ext cx="6035040" cy="585216"/>
+            <a:off x="2606040" y="3968496"/>
+            <a:ext cx="6035040" cy="603504"/>
           </a:xfrm>
           <a:prstGeom prst="roundRect">
             <a:avLst>
-              <a:gd name="adj" fmla="val 21875"/>
+              <a:gd name="adj" fmla="val 21212"/>
             </a:avLst>
           </a:prstGeom>
           <a:solidFill>
@@ -5598,7 +5828,7 @@
         </p:nvSpPr>
         <p:spPr>
           <a:xfrm>
-            <a:off x="2834640" y="4315968"/>
+            <a:off x="2834640" y="4107180"/>
             <a:ext cx="118872" cy="118872"/>
           </a:xfrm>
           <a:prstGeom prst="ellipse">
@@ -5623,17 +5853,17 @@
         </p:nvSpPr>
         <p:spPr>
           <a:xfrm>
-            <a:off x="3127248" y="4151376"/>
-            <a:ext cx="2377440" cy="274320"/>
-          </a:xfrm>
-          <a:prstGeom prst="rect">
-            <a:avLst/>
-          </a:prstGeom>
-          <a:noFill/>
-          <a:ln/>
-        </p:spPr>
-        <p:txBody>
-          <a:bodyPr wrap="square" lIns="0" tIns="0" rIns="0" bIns="0" rtlCol="0" anchor="ctr"/>
+            <a:off x="3127248" y="4059936"/>
+            <a:ext cx="2377440" cy="237744"/>
+          </a:xfrm>
+          <a:prstGeom prst="rect">
+            <a:avLst/>
+          </a:prstGeom>
+          <a:noFill/>
+          <a:ln/>
+        </p:spPr>
+        <p:txBody>
+          <a:bodyPr wrap="square" lIns="0" tIns="0" rIns="0" bIns="0" rtlCol="0" anchor="t"/>
           <a:lstStyle/>
           <a:p>
             <a:pPr indent="0" marL="0">
@@ -5662,17 +5892,17 @@
         </p:nvSpPr>
         <p:spPr>
           <a:xfrm>
-            <a:off x="3127248" y="4389120"/>
-            <a:ext cx="5303520" cy="237744"/>
-          </a:xfrm>
-          <a:prstGeom prst="rect">
-            <a:avLst/>
-          </a:prstGeom>
-          <a:noFill/>
-          <a:ln/>
-        </p:spPr>
-        <p:txBody>
-          <a:bodyPr wrap="square" lIns="0" tIns="0" rIns="0" bIns="0" rtlCol="0" anchor="ctr"/>
+            <a:off x="3127248" y="4297680"/>
+            <a:ext cx="5303520" cy="219456"/>
+          </a:xfrm>
+          <a:prstGeom prst="rect">
+            <a:avLst/>
+          </a:prstGeom>
+          <a:noFill/>
+          <a:ln/>
+        </p:spPr>
+        <p:txBody>
+          <a:bodyPr wrap="square" lIns="0" tIns="0" rIns="0" bIns="0" rtlCol="0" anchor="t"/>
           <a:lstStyle/>
           <a:p>
             <a:pPr indent="0" marL="0">
@@ -5733,7 +5963,7 @@
         </p:nvSpPr>
         <p:spPr>
           <a:xfrm>
-            <a:off x="502920" y="219456"/>
+            <a:off x="502920" y="256032"/>
             <a:ext cx="8138160" cy="219456"/>
           </a:xfrm>
           <a:prstGeom prst="rect">
@@ -5743,7 +5973,7 @@
           <a:ln/>
         </p:spPr>
         <p:txBody>
-          <a:bodyPr wrap="square" lIns="0" tIns="0" rIns="0" bIns="0" rtlCol="0" anchor="ctr"/>
+          <a:bodyPr wrap="square" lIns="0" tIns="0" rIns="0" bIns="0" rtlCol="0" anchor="t"/>
           <a:lstStyle/>
           <a:p>
             <a:pPr indent="0" marL="0">
@@ -5772,17 +6002,17 @@
         </p:nvSpPr>
         <p:spPr>
           <a:xfrm>
-            <a:off x="502920" y="384048"/>
-            <a:ext cx="8138160" cy="621792"/>
-          </a:xfrm>
-          <a:prstGeom prst="rect">
-            <a:avLst/>
-          </a:prstGeom>
-          <a:noFill/>
-          <a:ln/>
-        </p:spPr>
-        <p:txBody>
-          <a:bodyPr wrap="square" lIns="0" tIns="0" rIns="0" bIns="0" rtlCol="0" anchor="ctr"/>
+            <a:off x="502920" y="457200"/>
+            <a:ext cx="8138160" cy="603504"/>
+          </a:xfrm>
+          <a:prstGeom prst="rect">
+            <a:avLst/>
+          </a:prstGeom>
+          <a:noFill/>
+          <a:ln/>
+        </p:spPr>
+        <p:txBody>
+          <a:bodyPr wrap="square" lIns="0" tIns="0" rIns="0" bIns="0" rtlCol="0" anchor="t"/>
           <a:lstStyle/>
           <a:p>
             <a:pPr indent="0" marL="0">
@@ -5819,8 +6049,8 @@
         </p:blipFill>
         <p:spPr>
           <a:xfrm>
-            <a:off x="6309360" y="1234440"/>
-            <a:ext cx="1819656" cy="3566160"/>
+            <a:off x="6913448" y="1188720"/>
+            <a:ext cx="1727632" cy="3383280"/>
           </a:xfrm>
           <a:prstGeom prst="rect">
             <a:avLst/>
@@ -5835,17 +6065,17 @@
         </p:nvSpPr>
         <p:spPr>
           <a:xfrm>
-            <a:off x="502920" y="1280160"/>
-            <a:ext cx="5532120" cy="512064"/>
-          </a:xfrm>
-          <a:prstGeom prst="rect">
-            <a:avLst/>
-          </a:prstGeom>
-          <a:noFill/>
-          <a:ln/>
-        </p:spPr>
-        <p:txBody>
-          <a:bodyPr wrap="square" lIns="0" tIns="0" rIns="0" bIns="0" rtlCol="0" anchor="ctr"/>
+            <a:off x="502920" y="1188720"/>
+            <a:ext cx="6136208" cy="548640"/>
+          </a:xfrm>
+          <a:prstGeom prst="rect">
+            <a:avLst/>
+          </a:prstGeom>
+          <a:noFill/>
+          <a:ln/>
+        </p:spPr>
+        <p:txBody>
+          <a:bodyPr wrap="square" lIns="0" tIns="0" rIns="0" bIns="0" rtlCol="0" anchor="t"/>
           <a:lstStyle/>
           <a:p>
             <a:pPr indent="0" marL="0">
@@ -5877,12 +6107,12 @@
         </p:nvSpPr>
         <p:spPr>
           <a:xfrm>
-            <a:off x="502920" y="1920240"/>
-            <a:ext cx="5532120" cy="859536"/>
+            <a:off x="502920" y="1810512"/>
+            <a:ext cx="6136208" cy="832104"/>
           </a:xfrm>
           <a:prstGeom prst="roundRect">
             <a:avLst>
-              <a:gd name="adj" fmla="val 14894"/>
+              <a:gd name="adj" fmla="val 15385"/>
             </a:avLst>
           </a:prstGeom>
           <a:solidFill>
@@ -5911,17 +6141,17 @@
         </p:nvSpPr>
         <p:spPr>
           <a:xfrm>
-            <a:off x="740664" y="2029968"/>
-            <a:ext cx="5029200" cy="256032"/>
-          </a:xfrm>
-          <a:prstGeom prst="rect">
-            <a:avLst/>
-          </a:prstGeom>
-          <a:noFill/>
-          <a:ln/>
-        </p:spPr>
-        <p:txBody>
-          <a:bodyPr wrap="square" lIns="0" tIns="0" rIns="0" bIns="0" rtlCol="0" anchor="ctr"/>
+            <a:off x="740664" y="1938528"/>
+            <a:ext cx="5660720" cy="256032"/>
+          </a:xfrm>
+          <a:prstGeom prst="rect">
+            <a:avLst/>
+          </a:prstGeom>
+          <a:noFill/>
+          <a:ln/>
+        </p:spPr>
+        <p:txBody>
+          <a:bodyPr wrap="square" lIns="0" tIns="0" rIns="0" bIns="0" rtlCol="0" anchor="t"/>
           <a:lstStyle/>
           <a:p>
             <a:pPr indent="0" marL="0">
@@ -5950,17 +6180,17 @@
         </p:nvSpPr>
         <p:spPr>
           <a:xfrm>
-            <a:off x="740664" y="2286000"/>
-            <a:ext cx="5074920" cy="420624"/>
-          </a:xfrm>
-          <a:prstGeom prst="rect">
-            <a:avLst/>
-          </a:prstGeom>
-          <a:noFill/>
-          <a:ln/>
-        </p:spPr>
-        <p:txBody>
-          <a:bodyPr wrap="square" lIns="0" tIns="0" rIns="0" bIns="0" rtlCol="0" anchor="ctr"/>
+            <a:off x="740664" y="2212848"/>
+            <a:ext cx="5660720" cy="402336"/>
+          </a:xfrm>
+          <a:prstGeom prst="rect">
+            <a:avLst/>
+          </a:prstGeom>
+          <a:noFill/>
+          <a:ln/>
+        </p:spPr>
+        <p:txBody>
+          <a:bodyPr wrap="square" lIns="0" tIns="0" rIns="0" bIns="0" rtlCol="0" anchor="t"/>
           <a:lstStyle/>
           <a:p>
             <a:pPr indent="0" marL="0">
@@ -5992,12 +6222,12 @@
         </p:nvSpPr>
         <p:spPr>
           <a:xfrm>
-            <a:off x="502920" y="2889504"/>
-            <a:ext cx="5532120" cy="859536"/>
+            <a:off x="502920" y="2734056"/>
+            <a:ext cx="6136208" cy="832104"/>
           </a:xfrm>
           <a:prstGeom prst="roundRect">
             <a:avLst>
-              <a:gd name="adj" fmla="val 14894"/>
+              <a:gd name="adj" fmla="val 15385"/>
             </a:avLst>
           </a:prstGeom>
           <a:solidFill>
@@ -6026,17 +6256,17 @@
         </p:nvSpPr>
         <p:spPr>
           <a:xfrm>
-            <a:off x="740664" y="2999232"/>
-            <a:ext cx="5029200" cy="256032"/>
-          </a:xfrm>
-          <a:prstGeom prst="rect">
-            <a:avLst/>
-          </a:prstGeom>
-          <a:noFill/>
-          <a:ln/>
-        </p:spPr>
-        <p:txBody>
-          <a:bodyPr wrap="square" lIns="0" tIns="0" rIns="0" bIns="0" rtlCol="0" anchor="ctr"/>
+            <a:off x="740664" y="2862072"/>
+            <a:ext cx="5660720" cy="256032"/>
+          </a:xfrm>
+          <a:prstGeom prst="rect">
+            <a:avLst/>
+          </a:prstGeom>
+          <a:noFill/>
+          <a:ln/>
+        </p:spPr>
+        <p:txBody>
+          <a:bodyPr wrap="square" lIns="0" tIns="0" rIns="0" bIns="0" rtlCol="0" anchor="t"/>
           <a:lstStyle/>
           <a:p>
             <a:pPr indent="0" marL="0">
@@ -6065,17 +6295,17 @@
         </p:nvSpPr>
         <p:spPr>
           <a:xfrm>
-            <a:off x="740664" y="3255264"/>
-            <a:ext cx="5074920" cy="420624"/>
-          </a:xfrm>
-          <a:prstGeom prst="rect">
-            <a:avLst/>
-          </a:prstGeom>
-          <a:noFill/>
-          <a:ln/>
-        </p:spPr>
-        <p:txBody>
-          <a:bodyPr wrap="square" lIns="0" tIns="0" rIns="0" bIns="0" rtlCol="0" anchor="ctr"/>
+            <a:off x="740664" y="3136392"/>
+            <a:ext cx="5660720" cy="402336"/>
+          </a:xfrm>
+          <a:prstGeom prst="rect">
+            <a:avLst/>
+          </a:prstGeom>
+          <a:noFill/>
+          <a:ln/>
+        </p:spPr>
+        <p:txBody>
+          <a:bodyPr wrap="square" lIns="0" tIns="0" rIns="0" bIns="0" rtlCol="0" anchor="t"/>
           <a:lstStyle/>
           <a:p>
             <a:pPr indent="0" marL="0">
@@ -6093,7 +6323,7 @@
                 <a:ea typeface="Calibri" pitchFamily="34" charset="-122"/>
                 <a:cs typeface="Calibri" pitchFamily="34" charset="-120"/>
               </a:rPr>
-              <a:t>Каждый результат начинается с сильной стороны. Совет — один и небольшой, на пробу.</a:t>
+              <a:t>Каждый результат начинается с сильной стороны. Совет один и небольшой, на пробу.</a:t>
             </a:r>
             <a:endParaRPr lang="en-US" sz="1200" dirty="0"/>
           </a:p>
@@ -6107,12 +6337,12 @@
         </p:nvSpPr>
         <p:spPr>
           <a:xfrm>
-            <a:off x="502920" y="3858768"/>
-            <a:ext cx="5532120" cy="859536"/>
+            <a:off x="502920" y="3657600"/>
+            <a:ext cx="6136208" cy="832104"/>
           </a:xfrm>
           <a:prstGeom prst="roundRect">
             <a:avLst>
-              <a:gd name="adj" fmla="val 14894"/>
+              <a:gd name="adj" fmla="val 15385"/>
             </a:avLst>
           </a:prstGeom>
           <a:solidFill>
@@ -6141,17 +6371,17 @@
         </p:nvSpPr>
         <p:spPr>
           <a:xfrm>
-            <a:off x="740664" y="3968496"/>
-            <a:ext cx="5029200" cy="256032"/>
-          </a:xfrm>
-          <a:prstGeom prst="rect">
-            <a:avLst/>
-          </a:prstGeom>
-          <a:noFill/>
-          <a:ln/>
-        </p:spPr>
-        <p:txBody>
-          <a:bodyPr wrap="square" lIns="0" tIns="0" rIns="0" bIns="0" rtlCol="0" anchor="ctr"/>
+            <a:off x="740664" y="3785616"/>
+            <a:ext cx="5660720" cy="256032"/>
+          </a:xfrm>
+          <a:prstGeom prst="rect">
+            <a:avLst/>
+          </a:prstGeom>
+          <a:noFill/>
+          <a:ln/>
+        </p:spPr>
+        <p:txBody>
+          <a:bodyPr wrap="square" lIns="0" tIns="0" rIns="0" bIns="0" rtlCol="0" anchor="t"/>
           <a:lstStyle/>
           <a:p>
             <a:pPr indent="0" marL="0">
@@ -6180,17 +6410,17 @@
         </p:nvSpPr>
         <p:spPr>
           <a:xfrm>
-            <a:off x="740664" y="4224528"/>
-            <a:ext cx="5074920" cy="420624"/>
-          </a:xfrm>
-          <a:prstGeom prst="rect">
-            <a:avLst/>
-          </a:prstGeom>
-          <a:noFill/>
-          <a:ln/>
-        </p:spPr>
-        <p:txBody>
-          <a:bodyPr wrap="square" lIns="0" tIns="0" rIns="0" bIns="0" rtlCol="0" anchor="ctr"/>
+            <a:off x="740664" y="4059936"/>
+            <a:ext cx="5660720" cy="402336"/>
+          </a:xfrm>
+          <a:prstGeom prst="rect">
+            <a:avLst/>
+          </a:prstGeom>
+          <a:noFill/>
+          <a:ln/>
+        </p:spPr>
+        <p:txBody>
+          <a:bodyPr wrap="square" lIns="0" tIns="0" rIns="0" bIns="0" rtlCol="0" anchor="t"/>
           <a:lstStyle/>
           <a:p>
             <a:pPr indent="0" marL="0">
@@ -6254,7 +6484,7 @@
         </p:nvSpPr>
         <p:spPr>
           <a:xfrm>
-            <a:off x="502920" y="219456"/>
+            <a:off x="502920" y="256032"/>
             <a:ext cx="8138160" cy="219456"/>
           </a:xfrm>
           <a:prstGeom prst="rect">
@@ -6264,7 +6494,7 @@
           <a:ln/>
         </p:spPr>
         <p:txBody>
-          <a:bodyPr wrap="square" lIns="0" tIns="0" rIns="0" bIns="0" rtlCol="0" anchor="ctr"/>
+          <a:bodyPr wrap="square" lIns="0" tIns="0" rIns="0" bIns="0" rtlCol="0" anchor="t"/>
           <a:lstStyle/>
           <a:p>
             <a:pPr indent="0" marL="0">
@@ -6293,17 +6523,17 @@
         </p:nvSpPr>
         <p:spPr>
           <a:xfrm>
-            <a:off x="502920" y="384048"/>
-            <a:ext cx="8138160" cy="621792"/>
-          </a:xfrm>
-          <a:prstGeom prst="rect">
-            <a:avLst/>
-          </a:prstGeom>
-          <a:noFill/>
-          <a:ln/>
-        </p:spPr>
-        <p:txBody>
-          <a:bodyPr wrap="square" lIns="0" tIns="0" rIns="0" bIns="0" rtlCol="0" anchor="ctr"/>
+            <a:off x="502920" y="457200"/>
+            <a:ext cx="8138160" cy="603504"/>
+          </a:xfrm>
+          <a:prstGeom prst="rect">
+            <a:avLst/>
+          </a:prstGeom>
+          <a:noFill/>
+          <a:ln/>
+        </p:spPr>
+        <p:txBody>
+          <a:bodyPr wrap="square" lIns="0" tIns="0" rIns="0" bIns="0" rtlCol="0" anchor="t"/>
           <a:lstStyle/>
           <a:p>
             <a:pPr indent="0" marL="0">
@@ -6340,8 +6570,8 @@
         </p:blipFill>
         <p:spPr>
           <a:xfrm>
-            <a:off x="502920" y="1280160"/>
-            <a:ext cx="1801368" cy="3520440"/>
+            <a:off x="502920" y="1188720"/>
+            <a:ext cx="1727632" cy="3383280"/>
           </a:xfrm>
           <a:prstGeom prst="rect">
             <a:avLst/>
@@ -6356,12 +6586,12 @@
         </p:nvSpPr>
         <p:spPr>
           <a:xfrm>
-            <a:off x="2606040" y="1298448"/>
-            <a:ext cx="6035040" cy="1188720"/>
+            <a:off x="2606040" y="1188720"/>
+            <a:ext cx="6035040" cy="1243584"/>
           </a:xfrm>
           <a:prstGeom prst="roundRect">
             <a:avLst>
-              <a:gd name="adj" fmla="val 10769"/>
+              <a:gd name="adj" fmla="val 10294"/>
             </a:avLst>
           </a:prstGeom>
           <a:solidFill>
@@ -6390,7 +6620,7 @@
         </p:nvSpPr>
         <p:spPr>
           <a:xfrm>
-            <a:off x="2834640" y="1444752"/>
+            <a:off x="2834640" y="1353312"/>
             <a:ext cx="5577840" cy="274320"/>
           </a:xfrm>
           <a:prstGeom prst="rect">
@@ -6400,7 +6630,7 @@
           <a:ln/>
         </p:spPr>
         <p:txBody>
-          <a:bodyPr wrap="square" lIns="0" tIns="0" rIns="0" bIns="0" rtlCol="0" anchor="ctr"/>
+          <a:bodyPr wrap="square" lIns="0" tIns="0" rIns="0" bIns="0" rtlCol="0" anchor="t"/>
           <a:lstStyle/>
           <a:p>
             <a:pPr indent="0" marL="0">
@@ -6415,7 +6645,7 @@
                 <a:ea typeface="Calibri" pitchFamily="34" charset="-122"/>
                 <a:cs typeface="Calibri" pitchFamily="34" charset="-120"/>
               </a:rPr>
-              <a:t>«Новый контакт» — для ребёнка</a:t>
+              <a:t>«Новый контакт» для ребёнка</a:t>
             </a:r>
             <a:endParaRPr lang="en-US" sz="1500" dirty="0"/>
           </a:p>
@@ -6429,17 +6659,17 @@
         </p:nvSpPr>
         <p:spPr>
           <a:xfrm>
-            <a:off x="2834640" y="1755648"/>
-            <a:ext cx="5577840" cy="603504"/>
-          </a:xfrm>
-          <a:prstGeom prst="rect">
-            <a:avLst/>
-          </a:prstGeom>
-          <a:noFill/>
-          <a:ln/>
-        </p:spPr>
-        <p:txBody>
-          <a:bodyPr wrap="square" lIns="0" tIns="0" rIns="0" bIns="0" rtlCol="0" anchor="ctr"/>
+            <a:off x="2834640" y="1682496"/>
+            <a:ext cx="5577840" cy="585216"/>
+          </a:xfrm>
+          <a:prstGeom prst="rect">
+            <a:avLst/>
+          </a:prstGeom>
+          <a:noFill/>
+          <a:ln/>
+        </p:spPr>
+        <p:txBody>
+          <a:bodyPr wrap="square" lIns="0" tIns="0" rIns="0" bIns="0" rtlCol="0" anchor="t"/>
           <a:lstStyle/>
           <a:p>
             <a:pPr indent="0" marL="0">
@@ -6471,12 +6701,12 @@
         </p:nvSpPr>
         <p:spPr>
           <a:xfrm>
-            <a:off x="2606040" y="2670048"/>
-            <a:ext cx="6035040" cy="1188720"/>
+            <a:off x="2606040" y="2542032"/>
+            <a:ext cx="6035040" cy="1243584"/>
           </a:xfrm>
           <a:prstGeom prst="roundRect">
             <a:avLst>
-              <a:gd name="adj" fmla="val 10769"/>
+              <a:gd name="adj" fmla="val 10294"/>
             </a:avLst>
           </a:prstGeom>
           <a:solidFill>
@@ -6505,7 +6735,7 @@
         </p:nvSpPr>
         <p:spPr>
           <a:xfrm>
-            <a:off x="2834640" y="2816352"/>
+            <a:off x="2834640" y="2706624"/>
             <a:ext cx="5577840" cy="274320"/>
           </a:xfrm>
           <a:prstGeom prst="rect">
@@ -6515,7 +6745,7 @@
           <a:ln/>
         </p:spPr>
         <p:txBody>
-          <a:bodyPr wrap="square" lIns="0" tIns="0" rIns="0" bIns="0" rtlCol="0" anchor="ctr"/>
+          <a:bodyPr wrap="square" lIns="0" tIns="0" rIns="0" bIns="0" rtlCol="0" anchor="t"/>
           <a:lstStyle/>
           <a:p>
             <a:pPr indent="0" marL="0">
@@ -6530,7 +6760,7 @@
                 <a:ea typeface="Calibri" pitchFamily="34" charset="-122"/>
                 <a:cs typeface="Calibri" pitchFamily="34" charset="-120"/>
               </a:rPr>
-              <a:t>«День из жизни» — для взрослого</a:t>
+              <a:t>«День из жизни» для взрослого</a:t>
             </a:r>
             <a:endParaRPr lang="en-US" sz="1500" dirty="0"/>
           </a:p>
@@ -6544,17 +6774,17 @@
         </p:nvSpPr>
         <p:spPr>
           <a:xfrm>
-            <a:off x="2834640" y="3127248"/>
-            <a:ext cx="5577840" cy="603504"/>
-          </a:xfrm>
-          <a:prstGeom prst="rect">
-            <a:avLst/>
-          </a:prstGeom>
-          <a:noFill/>
-          <a:ln/>
-        </p:spPr>
-        <p:txBody>
-          <a:bodyPr wrap="square" lIns="0" tIns="0" rIns="0" bIns="0" rtlCol="0" anchor="ctr"/>
+            <a:off x="2834640" y="3035808"/>
+            <a:ext cx="5577840" cy="585216"/>
+          </a:xfrm>
+          <a:prstGeom prst="rect">
+            <a:avLst/>
+          </a:prstGeom>
+          <a:noFill/>
+          <a:ln/>
+        </p:spPr>
+        <p:txBody>
+          <a:bodyPr wrap="square" lIns="0" tIns="0" rIns="0" bIns="0" rtlCol="0" anchor="t"/>
           <a:lstStyle/>
           <a:p>
             <a:pPr indent="0" marL="0">
@@ -6586,12 +6816,12 @@
         </p:nvSpPr>
         <p:spPr>
           <a:xfrm>
-            <a:off x="2606040" y="4041648"/>
-            <a:ext cx="6035040" cy="758952"/>
+            <a:off x="2606040" y="3931920"/>
+            <a:ext cx="6035040" cy="658368"/>
           </a:xfrm>
           <a:prstGeom prst="roundRect">
             <a:avLst>
-              <a:gd name="adj" fmla="val 16867"/>
+              <a:gd name="adj" fmla="val 19444"/>
             </a:avLst>
           </a:prstGeom>
           <a:solidFill>
@@ -6620,8 +6850,8 @@
         </p:nvSpPr>
         <p:spPr>
           <a:xfrm>
-            <a:off x="2834640" y="4224528"/>
-            <a:ext cx="5577840" cy="402336"/>
+            <a:off x="2898648" y="3931920"/>
+            <a:ext cx="5449824" cy="658368"/>
           </a:xfrm>
           <a:prstGeom prst="rect">
             <a:avLst/>
@@ -6634,6 +6864,9 @@
           <a:lstStyle/>
           <a:p>
             <a:pPr indent="0" marL="0">
+              <a:lnSpc>
+                <a:spcPts val="1755"/>
+              </a:lnSpc>
               <a:buNone/>
             </a:pPr>
             <a:r>
@@ -6645,7 +6878,7 @@
                 <a:ea typeface="Calibri" pitchFamily="34" charset="-122"/>
                 <a:cs typeface="Calibri" pitchFamily="34" charset="-120"/>
               </a:rPr>
-              <a:t>Истории лежат в обычных файлах — психолог добавляет новые сам.</a:t>
+              <a:t>Истории лежат в обычных файлах, психолог добавляет новые сам.</a:t>
             </a:r>
             <a:endParaRPr lang="en-US" sz="1300" dirty="0"/>
           </a:p>
@@ -6691,7 +6924,7 @@
         </p:nvSpPr>
         <p:spPr>
           <a:xfrm>
-            <a:off x="502920" y="219456"/>
+            <a:off x="502920" y="256032"/>
             <a:ext cx="8138160" cy="219456"/>
           </a:xfrm>
           <a:prstGeom prst="rect">
@@ -6701,7 +6934,7 @@
           <a:ln/>
         </p:spPr>
         <p:txBody>
-          <a:bodyPr wrap="square" lIns="0" tIns="0" rIns="0" bIns="0" rtlCol="0" anchor="ctr"/>
+          <a:bodyPr wrap="square" lIns="0" tIns="0" rIns="0" bIns="0" rtlCol="0" anchor="t"/>
           <a:lstStyle/>
           <a:p>
             <a:pPr indent="0" marL="0">
@@ -6730,17 +6963,17 @@
         </p:nvSpPr>
         <p:spPr>
           <a:xfrm>
-            <a:off x="502920" y="384048"/>
-            <a:ext cx="8138160" cy="621792"/>
-          </a:xfrm>
-          <a:prstGeom prst="rect">
-            <a:avLst/>
-          </a:prstGeom>
-          <a:noFill/>
-          <a:ln/>
-        </p:spPr>
-        <p:txBody>
-          <a:bodyPr wrap="square" lIns="0" tIns="0" rIns="0" bIns="0" rtlCol="0" anchor="ctr"/>
+            <a:off x="502920" y="457200"/>
+            <a:ext cx="8138160" cy="603504"/>
+          </a:xfrm>
+          <a:prstGeom prst="rect">
+            <a:avLst/>
+          </a:prstGeom>
+          <a:noFill/>
+          <a:ln/>
+        </p:spPr>
+        <p:txBody>
+          <a:bodyPr wrap="square" lIns="0" tIns="0" rIns="0" bIns="0" rtlCol="0" anchor="t"/>
           <a:lstStyle/>
           <a:p>
             <a:pPr indent="0" marL="0">
@@ -6777,8 +7010,8 @@
         </p:blipFill>
         <p:spPr>
           <a:xfrm>
-            <a:off x="6400800" y="1234440"/>
-            <a:ext cx="1819656" cy="3566160"/>
+            <a:off x="6913448" y="1188720"/>
+            <a:ext cx="1727632" cy="3383280"/>
           </a:xfrm>
           <a:prstGeom prst="rect">
             <a:avLst/>
@@ -6793,17 +7026,17 @@
         </p:nvSpPr>
         <p:spPr>
           <a:xfrm>
-            <a:off x="502920" y="1261872"/>
-            <a:ext cx="5623560" cy="603504"/>
-          </a:xfrm>
-          <a:prstGeom prst="rect">
-            <a:avLst/>
-          </a:prstGeom>
-          <a:noFill/>
-          <a:ln/>
-        </p:spPr>
-        <p:txBody>
-          <a:bodyPr wrap="square" lIns="0" tIns="0" rIns="0" bIns="0" rtlCol="0" anchor="ctr"/>
+            <a:off x="502920" y="1188720"/>
+            <a:ext cx="6136208" cy="548640"/>
+          </a:xfrm>
+          <a:prstGeom prst="rect">
+            <a:avLst/>
+          </a:prstGeom>
+          <a:noFill/>
+          <a:ln/>
+        </p:spPr>
+        <p:txBody>
+          <a:bodyPr wrap="square" lIns="0" tIns="0" rIns="0" bIns="0" rtlCol="0" anchor="t"/>
           <a:lstStyle/>
           <a:p>
             <a:pPr indent="0" marL="0">
@@ -6835,12 +7068,12 @@
         </p:nvSpPr>
         <p:spPr>
           <a:xfrm>
-            <a:off x="502920" y="2011680"/>
-            <a:ext cx="2697480" cy="402336"/>
+            <a:off x="502920" y="1883664"/>
+            <a:ext cx="2953804" cy="438912"/>
           </a:xfrm>
           <a:prstGeom prst="roundRect">
             <a:avLst>
-              <a:gd name="adj" fmla="val 31818"/>
+              <a:gd name="adj" fmla="val 29167"/>
             </a:avLst>
           </a:prstGeom>
           <a:solidFill>
@@ -6869,7 +7102,7 @@
         </p:nvSpPr>
         <p:spPr>
           <a:xfrm>
-            <a:off x="667512" y="2153412"/>
+            <a:off x="685800" y="2048256"/>
             <a:ext cx="109728" cy="109728"/>
           </a:xfrm>
           <a:prstGeom prst="ellipse">
@@ -6894,8 +7127,8 @@
         </p:nvSpPr>
         <p:spPr>
           <a:xfrm>
-            <a:off x="868680" y="2057400"/>
-            <a:ext cx="2212848" cy="310896"/>
+            <a:off x="905256" y="1883664"/>
+            <a:ext cx="2405164" cy="438912"/>
           </a:xfrm>
           <a:prstGeom prst="rect">
             <a:avLst/>
@@ -6933,12 +7166,12 @@
         </p:nvSpPr>
         <p:spPr>
           <a:xfrm>
-            <a:off x="3383280" y="2011680"/>
-            <a:ext cx="2697480" cy="402336"/>
+            <a:off x="3685324" y="1883664"/>
+            <a:ext cx="2953804" cy="438912"/>
           </a:xfrm>
           <a:prstGeom prst="roundRect">
             <a:avLst>
-              <a:gd name="adj" fmla="val 31818"/>
+              <a:gd name="adj" fmla="val 29167"/>
             </a:avLst>
           </a:prstGeom>
           <a:solidFill>
@@ -6967,7 +7200,7 @@
         </p:nvSpPr>
         <p:spPr>
           <a:xfrm>
-            <a:off x="3547872" y="2153412"/>
+            <a:off x="3868204" y="2048256"/>
             <a:ext cx="109728" cy="109728"/>
           </a:xfrm>
           <a:prstGeom prst="ellipse">
@@ -6992,8 +7225,8 @@
         </p:nvSpPr>
         <p:spPr>
           <a:xfrm>
-            <a:off x="3749040" y="2057400"/>
-            <a:ext cx="2212848" cy="310896"/>
+            <a:off x="4087660" y="1883664"/>
+            <a:ext cx="2405164" cy="438912"/>
           </a:xfrm>
           <a:prstGeom prst="rect">
             <a:avLst/>
@@ -7031,12 +7264,12 @@
         </p:nvSpPr>
         <p:spPr>
           <a:xfrm>
-            <a:off x="502920" y="2496312"/>
-            <a:ext cx="2697480" cy="402336"/>
+            <a:off x="502920" y="2395728"/>
+            <a:ext cx="2953804" cy="438912"/>
           </a:xfrm>
           <a:prstGeom prst="roundRect">
             <a:avLst>
-              <a:gd name="adj" fmla="val 31818"/>
+              <a:gd name="adj" fmla="val 29167"/>
             </a:avLst>
           </a:prstGeom>
           <a:solidFill>
@@ -7065,7 +7298,7 @@
         </p:nvSpPr>
         <p:spPr>
           <a:xfrm>
-            <a:off x="667512" y="2638044"/>
+            <a:off x="685800" y="2560320"/>
             <a:ext cx="109728" cy="109728"/>
           </a:xfrm>
           <a:prstGeom prst="ellipse">
@@ -7090,8 +7323,8 @@
         </p:nvSpPr>
         <p:spPr>
           <a:xfrm>
-            <a:off x="868680" y="2542032"/>
-            <a:ext cx="2212848" cy="310896"/>
+            <a:off x="905256" y="2395728"/>
+            <a:ext cx="2405164" cy="438912"/>
           </a:xfrm>
           <a:prstGeom prst="rect">
             <a:avLst/>
@@ -7129,12 +7362,12 @@
         </p:nvSpPr>
         <p:spPr>
           <a:xfrm>
-            <a:off x="3383280" y="2496312"/>
-            <a:ext cx="2697480" cy="402336"/>
+            <a:off x="3685324" y="2395728"/>
+            <a:ext cx="2953804" cy="438912"/>
           </a:xfrm>
           <a:prstGeom prst="roundRect">
             <a:avLst>
-              <a:gd name="adj" fmla="val 31818"/>
+              <a:gd name="adj" fmla="val 29167"/>
             </a:avLst>
           </a:prstGeom>
           <a:solidFill>
@@ -7163,7 +7396,7 @@
         </p:nvSpPr>
         <p:spPr>
           <a:xfrm>
-            <a:off x="3547872" y="2638044"/>
+            <a:off x="3868204" y="2560320"/>
             <a:ext cx="109728" cy="109728"/>
           </a:xfrm>
           <a:prstGeom prst="ellipse">
@@ -7188,8 +7421,8 @@
         </p:nvSpPr>
         <p:spPr>
           <a:xfrm>
-            <a:off x="3749040" y="2542032"/>
-            <a:ext cx="2212848" cy="310896"/>
+            <a:off x="4087660" y="2395728"/>
+            <a:ext cx="2405164" cy="438912"/>
           </a:xfrm>
           <a:prstGeom prst="rect">
             <a:avLst/>
@@ -7227,12 +7460,12 @@
         </p:nvSpPr>
         <p:spPr>
           <a:xfrm>
-            <a:off x="502920" y="2980944"/>
-            <a:ext cx="2697480" cy="402336"/>
+            <a:off x="502920" y="2907792"/>
+            <a:ext cx="2953804" cy="438912"/>
           </a:xfrm>
           <a:prstGeom prst="roundRect">
             <a:avLst>
-              <a:gd name="adj" fmla="val 31818"/>
+              <a:gd name="adj" fmla="val 29167"/>
             </a:avLst>
           </a:prstGeom>
           <a:solidFill>
@@ -7261,7 +7494,7 @@
         </p:nvSpPr>
         <p:spPr>
           <a:xfrm>
-            <a:off x="667512" y="3122676"/>
+            <a:off x="685800" y="3072384"/>
             <a:ext cx="109728" cy="109728"/>
           </a:xfrm>
           <a:prstGeom prst="ellipse">
@@ -7286,8 +7519,8 @@
         </p:nvSpPr>
         <p:spPr>
           <a:xfrm>
-            <a:off x="868680" y="3026664"/>
-            <a:ext cx="2212848" cy="310896"/>
+            <a:off x="905256" y="2907792"/>
+            <a:ext cx="2405164" cy="438912"/>
           </a:xfrm>
           <a:prstGeom prst="rect">
             <a:avLst/>
@@ -7325,12 +7558,12 @@
         </p:nvSpPr>
         <p:spPr>
           <a:xfrm>
-            <a:off x="3383280" y="2980944"/>
-            <a:ext cx="2697480" cy="402336"/>
+            <a:off x="3685324" y="2907792"/>
+            <a:ext cx="2953804" cy="438912"/>
           </a:xfrm>
           <a:prstGeom prst="roundRect">
             <a:avLst>
-              <a:gd name="adj" fmla="val 31818"/>
+              <a:gd name="adj" fmla="val 29167"/>
             </a:avLst>
           </a:prstGeom>
           <a:solidFill>
@@ -7359,7 +7592,7 @@
         </p:nvSpPr>
         <p:spPr>
           <a:xfrm>
-            <a:off x="3547872" y="3122676"/>
+            <a:off x="3868204" y="3072384"/>
             <a:ext cx="109728" cy="109728"/>
           </a:xfrm>
           <a:prstGeom prst="ellipse">
@@ -7384,8 +7617,8 @@
         </p:nvSpPr>
         <p:spPr>
           <a:xfrm>
-            <a:off x="3749040" y="3026664"/>
-            <a:ext cx="2212848" cy="310896"/>
+            <a:off x="4087660" y="2907792"/>
+            <a:ext cx="2405164" cy="438912"/>
           </a:xfrm>
           <a:prstGeom prst="rect">
             <a:avLst/>
@@ -7423,12 +7656,12 @@
         </p:nvSpPr>
         <p:spPr>
           <a:xfrm>
-            <a:off x="502920" y="3465576"/>
-            <a:ext cx="2697480" cy="402336"/>
+            <a:off x="502920" y="3419856"/>
+            <a:ext cx="2953804" cy="438912"/>
           </a:xfrm>
           <a:prstGeom prst="roundRect">
             <a:avLst>
-              <a:gd name="adj" fmla="val 31818"/>
+              <a:gd name="adj" fmla="val 29167"/>
             </a:avLst>
           </a:prstGeom>
           <a:solidFill>
@@ -7457,7 +7690,7 @@
         </p:nvSpPr>
         <p:spPr>
           <a:xfrm>
-            <a:off x="667512" y="3607308"/>
+            <a:off x="685800" y="3584448"/>
             <a:ext cx="109728" cy="109728"/>
           </a:xfrm>
           <a:prstGeom prst="ellipse">
@@ -7482,8 +7715,8 @@
         </p:nvSpPr>
         <p:spPr>
           <a:xfrm>
-            <a:off x="868680" y="3511296"/>
-            <a:ext cx="2212848" cy="310896"/>
+            <a:off x="905256" y="3419856"/>
+            <a:ext cx="2405164" cy="438912"/>
           </a:xfrm>
           <a:prstGeom prst="rect">
             <a:avLst/>
@@ -7521,12 +7754,12 @@
         </p:nvSpPr>
         <p:spPr>
           <a:xfrm>
-            <a:off x="3383280" y="3465576"/>
-            <a:ext cx="2697480" cy="402336"/>
+            <a:off x="3685324" y="3419856"/>
+            <a:ext cx="2953804" cy="438912"/>
           </a:xfrm>
           <a:prstGeom prst="roundRect">
             <a:avLst>
-              <a:gd name="adj" fmla="val 31818"/>
+              <a:gd name="adj" fmla="val 29167"/>
             </a:avLst>
           </a:prstGeom>
           <a:solidFill>
@@ -7555,7 +7788,7 @@
         </p:nvSpPr>
         <p:spPr>
           <a:xfrm>
-            <a:off x="3547872" y="3607308"/>
+            <a:off x="3868204" y="3584448"/>
             <a:ext cx="109728" cy="109728"/>
           </a:xfrm>
           <a:prstGeom prst="ellipse">
@@ -7580,8 +7813,8 @@
         </p:nvSpPr>
         <p:spPr>
           <a:xfrm>
-            <a:off x="3749040" y="3511296"/>
-            <a:ext cx="2212848" cy="310896"/>
+            <a:off x="4087660" y="3419856"/>
+            <a:ext cx="2405164" cy="438912"/>
           </a:xfrm>
           <a:prstGeom prst="rect">
             <a:avLst/>
@@ -7620,11 +7853,11 @@
         <p:spPr>
           <a:xfrm>
             <a:off x="502920" y="4041648"/>
-            <a:ext cx="5623560" cy="731520"/>
+            <a:ext cx="6136208" cy="548640"/>
           </a:xfrm>
           <a:prstGeom prst="roundRect">
             <a:avLst>
-              <a:gd name="adj" fmla="val 17500"/>
+              <a:gd name="adj" fmla="val 23333"/>
             </a:avLst>
           </a:prstGeom>
           <a:solidFill>
@@ -7653,8 +7886,8 @@
         </p:nvSpPr>
         <p:spPr>
           <a:xfrm>
-            <a:off x="758952" y="4224528"/>
-            <a:ext cx="5212080" cy="384048"/>
+            <a:off x="795528" y="4041648"/>
+            <a:ext cx="5550992" cy="548640"/>
           </a:xfrm>
           <a:prstGeom prst="rect">
             <a:avLst/>
@@ -7668,7 +7901,7 @@
           <a:p>
             <a:pPr indent="0" marL="0">
               <a:lnSpc>
-                <a:spcPts val="1700"/>
+                <a:spcPts val="1688"/>
               </a:lnSpc>
               <a:buNone/>
             </a:pPr>
@@ -7727,7 +7960,7 @@
         </p:nvSpPr>
         <p:spPr>
           <a:xfrm>
-            <a:off x="502920" y="219456"/>
+            <a:off x="502920" y="256032"/>
             <a:ext cx="8138160" cy="219456"/>
           </a:xfrm>
           <a:prstGeom prst="rect">
@@ -7737,7 +7970,7 @@
           <a:ln/>
         </p:spPr>
         <p:txBody>
-          <a:bodyPr wrap="square" lIns="0" tIns="0" rIns="0" bIns="0" rtlCol="0" anchor="ctr"/>
+          <a:bodyPr wrap="square" lIns="0" tIns="0" rIns="0" bIns="0" rtlCol="0" anchor="t"/>
           <a:lstStyle/>
           <a:p>
             <a:pPr indent="0" marL="0">
@@ -7766,17 +7999,17 @@
         </p:nvSpPr>
         <p:spPr>
           <a:xfrm>
-            <a:off x="502920" y="384048"/>
-            <a:ext cx="8138160" cy="621792"/>
-          </a:xfrm>
-          <a:prstGeom prst="rect">
-            <a:avLst/>
-          </a:prstGeom>
-          <a:noFill/>
-          <a:ln/>
-        </p:spPr>
-        <p:txBody>
-          <a:bodyPr wrap="square" lIns="0" tIns="0" rIns="0" bIns="0" rtlCol="0" anchor="ctr"/>
+            <a:off x="502920" y="457200"/>
+            <a:ext cx="8138160" cy="603504"/>
+          </a:xfrm>
+          <a:prstGeom prst="rect">
+            <a:avLst/>
+          </a:prstGeom>
+          <a:noFill/>
+          <a:ln/>
+        </p:spPr>
+        <p:txBody>
+          <a:bodyPr wrap="square" lIns="0" tIns="0" rIns="0" bIns="0" rtlCol="0" anchor="t"/>
           <a:lstStyle/>
           <a:p>
             <a:pPr indent="0" marL="0">
@@ -7813,8 +8046,8 @@
         </p:blipFill>
         <p:spPr>
           <a:xfrm>
-            <a:off x="502920" y="1280160"/>
-            <a:ext cx="1801368" cy="3520440"/>
+            <a:off x="502920" y="1188720"/>
+            <a:ext cx="1727632" cy="3383280"/>
           </a:xfrm>
           <a:prstGeom prst="rect">
             <a:avLst/>
@@ -7829,12 +8062,12 @@
         </p:nvSpPr>
         <p:spPr>
           <a:xfrm>
-            <a:off x="2606040" y="1298448"/>
-            <a:ext cx="6035040" cy="1024128"/>
+            <a:off x="2606040" y="1188720"/>
+            <a:ext cx="6035040" cy="1060704"/>
           </a:xfrm>
           <a:prstGeom prst="roundRect">
             <a:avLst>
-              <a:gd name="adj" fmla="val 12500"/>
+              <a:gd name="adj" fmla="val 12069"/>
             </a:avLst>
           </a:prstGeom>
           <a:solidFill>
@@ -7863,7 +8096,7 @@
         </p:nvSpPr>
         <p:spPr>
           <a:xfrm>
-            <a:off x="2834640" y="1554480"/>
+            <a:off x="2834640" y="1404366"/>
             <a:ext cx="118872" cy="118872"/>
           </a:xfrm>
           <a:prstGeom prst="ellipse">
@@ -7888,7 +8121,7 @@
         </p:nvSpPr>
         <p:spPr>
           <a:xfrm>
-            <a:off x="3127248" y="1444752"/>
+            <a:off x="3127248" y="1353312"/>
             <a:ext cx="5303520" cy="274320"/>
           </a:xfrm>
           <a:prstGeom prst="rect">
@@ -7898,7 +8131,7 @@
           <a:ln/>
         </p:spPr>
         <p:txBody>
-          <a:bodyPr wrap="square" lIns="0" tIns="0" rIns="0" bIns="0" rtlCol="0" anchor="ctr"/>
+          <a:bodyPr wrap="square" lIns="0" tIns="0" rIns="0" bIns="0" rtlCol="0" anchor="t"/>
           <a:lstStyle/>
           <a:p>
             <a:pPr indent="0" marL="0">
@@ -7927,7 +8160,7 @@
         </p:nvSpPr>
         <p:spPr>
           <a:xfrm>
-            <a:off x="3127248" y="1755648"/>
+            <a:off x="3127248" y="1682496"/>
             <a:ext cx="5303520" cy="457200"/>
           </a:xfrm>
           <a:prstGeom prst="rect">
@@ -7937,7 +8170,7 @@
           <a:ln/>
         </p:spPr>
         <p:txBody>
-          <a:bodyPr wrap="square" lIns="0" tIns="0" rIns="0" bIns="0" rtlCol="0" anchor="ctr"/>
+          <a:bodyPr wrap="square" lIns="0" tIns="0" rIns="0" bIns="0" rtlCol="0" anchor="t"/>
           <a:lstStyle/>
           <a:p>
             <a:pPr indent="0" marL="0">
@@ -7969,12 +8202,12 @@
         </p:nvSpPr>
         <p:spPr>
           <a:xfrm>
-            <a:off x="2606040" y="2487168"/>
-            <a:ext cx="6035040" cy="1024128"/>
+            <a:off x="2606040" y="2359152"/>
+            <a:ext cx="6035040" cy="1060704"/>
           </a:xfrm>
           <a:prstGeom prst="roundRect">
             <a:avLst>
-              <a:gd name="adj" fmla="val 12500"/>
+              <a:gd name="adj" fmla="val 12069"/>
             </a:avLst>
           </a:prstGeom>
           <a:solidFill>
@@ -8003,7 +8236,7 @@
         </p:nvSpPr>
         <p:spPr>
           <a:xfrm>
-            <a:off x="2834640" y="2743200"/>
+            <a:off x="2834640" y="2574798"/>
             <a:ext cx="118872" cy="118872"/>
           </a:xfrm>
           <a:prstGeom prst="ellipse">
@@ -8028,7 +8261,7 @@
         </p:nvSpPr>
         <p:spPr>
           <a:xfrm>
-            <a:off x="3127248" y="2633472"/>
+            <a:off x="3127248" y="2523744"/>
             <a:ext cx="5303520" cy="274320"/>
           </a:xfrm>
           <a:prstGeom prst="rect">
@@ -8038,7 +8271,7 @@
           <a:ln/>
         </p:spPr>
         <p:txBody>
-          <a:bodyPr wrap="square" lIns="0" tIns="0" rIns="0" bIns="0" rtlCol="0" anchor="ctr"/>
+          <a:bodyPr wrap="square" lIns="0" tIns="0" rIns="0" bIns="0" rtlCol="0" anchor="t"/>
           <a:lstStyle/>
           <a:p>
             <a:pPr indent="0" marL="0">
@@ -8067,7 +8300,7 @@
         </p:nvSpPr>
         <p:spPr>
           <a:xfrm>
-            <a:off x="3127248" y="2944368"/>
+            <a:off x="3127248" y="2852928"/>
             <a:ext cx="5303520" cy="457200"/>
           </a:xfrm>
           <a:prstGeom prst="rect">
@@ -8077,7 +8310,7 @@
           <a:ln/>
         </p:spPr>
         <p:txBody>
-          <a:bodyPr wrap="square" lIns="0" tIns="0" rIns="0" bIns="0" rtlCol="0" anchor="ctr"/>
+          <a:bodyPr wrap="square" lIns="0" tIns="0" rIns="0" bIns="0" rtlCol="0" anchor="t"/>
           <a:lstStyle/>
           <a:p>
             <a:pPr indent="0" marL="0">
@@ -8109,12 +8342,12 @@
         </p:nvSpPr>
         <p:spPr>
           <a:xfrm>
-            <a:off x="2606040" y="3675888"/>
-            <a:ext cx="6035040" cy="1024128"/>
+            <a:off x="2606040" y="3529584"/>
+            <a:ext cx="6035040" cy="1060704"/>
           </a:xfrm>
           <a:prstGeom prst="roundRect">
             <a:avLst>
-              <a:gd name="adj" fmla="val 12500"/>
+              <a:gd name="adj" fmla="val 12069"/>
             </a:avLst>
           </a:prstGeom>
           <a:solidFill>
@@ -8143,7 +8376,7 @@
         </p:nvSpPr>
         <p:spPr>
           <a:xfrm>
-            <a:off x="2834640" y="3931920"/>
+            <a:off x="2834640" y="3745230"/>
             <a:ext cx="118872" cy="118872"/>
           </a:xfrm>
           <a:prstGeom prst="ellipse">
@@ -8168,7 +8401,7 @@
         </p:nvSpPr>
         <p:spPr>
           <a:xfrm>
-            <a:off x="3127248" y="3822192"/>
+            <a:off x="3127248" y="3694176"/>
             <a:ext cx="5303520" cy="274320"/>
           </a:xfrm>
           <a:prstGeom prst="rect">
@@ -8178,7 +8411,7 @@
           <a:ln/>
         </p:spPr>
         <p:txBody>
-          <a:bodyPr wrap="square" lIns="0" tIns="0" rIns="0" bIns="0" rtlCol="0" anchor="ctr"/>
+          <a:bodyPr wrap="square" lIns="0" tIns="0" rIns="0" bIns="0" rtlCol="0" anchor="t"/>
           <a:lstStyle/>
           <a:p>
             <a:pPr indent="0" marL="0">
@@ -8207,7 +8440,7 @@
         </p:nvSpPr>
         <p:spPr>
           <a:xfrm>
-            <a:off x="3127248" y="4133088"/>
+            <a:off x="3127248" y="4023360"/>
             <a:ext cx="5303520" cy="457200"/>
           </a:xfrm>
           <a:prstGeom prst="rect">
@@ -8217,7 +8450,7 @@
           <a:ln/>
         </p:spPr>
         <p:txBody>
-          <a:bodyPr wrap="square" lIns="0" tIns="0" rIns="0" bIns="0" rtlCol="0" anchor="ctr"/>
+          <a:bodyPr wrap="square" lIns="0" tIns="0" rIns="0" bIns="0" rtlCol="0" anchor="t"/>
           <a:lstStyle/>
           <a:p>
             <a:pPr indent="0" marL="0">
@@ -8281,7 +8514,7 @@
         </p:nvSpPr>
         <p:spPr>
           <a:xfrm>
-            <a:off x="502920" y="219456"/>
+            <a:off x="502920" y="256032"/>
             <a:ext cx="8138160" cy="219456"/>
           </a:xfrm>
           <a:prstGeom prst="rect">
@@ -8291,7 +8524,7 @@
           <a:ln/>
         </p:spPr>
         <p:txBody>
-          <a:bodyPr wrap="square" lIns="0" tIns="0" rIns="0" bIns="0" rtlCol="0" anchor="ctr"/>
+          <a:bodyPr wrap="square" lIns="0" tIns="0" rIns="0" bIns="0" rtlCol="0" anchor="t"/>
           <a:lstStyle/>
           <a:p>
             <a:pPr indent="0" marL="0">
@@ -8320,17 +8553,17 @@
         </p:nvSpPr>
         <p:spPr>
           <a:xfrm>
-            <a:off x="502920" y="384048"/>
-            <a:ext cx="8138160" cy="621792"/>
-          </a:xfrm>
-          <a:prstGeom prst="rect">
-            <a:avLst/>
-          </a:prstGeom>
-          <a:noFill/>
-          <a:ln/>
-        </p:spPr>
-        <p:txBody>
-          <a:bodyPr wrap="square" lIns="0" tIns="0" rIns="0" bIns="0" rtlCol="0" anchor="ctr"/>
+            <a:off x="502920" y="457200"/>
+            <a:ext cx="8138160" cy="603504"/>
+          </a:xfrm>
+          <a:prstGeom prst="rect">
+            <a:avLst/>
+          </a:prstGeom>
+          <a:noFill/>
+          <a:ln/>
+        </p:spPr>
+        <p:txBody>
+          <a:bodyPr wrap="square" lIns="0" tIns="0" rIns="0" bIns="0" rtlCol="0" anchor="t"/>
           <a:lstStyle/>
           <a:p>
             <a:pPr indent="0" marL="0">
@@ -8359,17 +8592,17 @@
         </p:nvSpPr>
         <p:spPr>
           <a:xfrm>
-            <a:off x="502920" y="1280160"/>
-            <a:ext cx="4846320" cy="877824"/>
-          </a:xfrm>
-          <a:prstGeom prst="rect">
-            <a:avLst/>
-          </a:prstGeom>
-          <a:noFill/>
-          <a:ln/>
-        </p:spPr>
-        <p:txBody>
-          <a:bodyPr wrap="square" lIns="0" tIns="0" rIns="0" bIns="0" rtlCol="0" anchor="ctr"/>
+            <a:off x="502920" y="1188720"/>
+            <a:ext cx="4846320" cy="822960"/>
+          </a:xfrm>
+          <a:prstGeom prst="rect">
+            <a:avLst/>
+          </a:prstGeom>
+          <a:noFill/>
+          <a:ln/>
+        </p:spPr>
+        <p:txBody>
+          <a:bodyPr wrap="square" lIns="0" tIns="0" rIns="0" bIns="0" rtlCol="0" anchor="t"/>
           <a:lstStyle/>
           <a:p>
             <a:pPr indent="0" marL="0">
@@ -8401,12 +8634,12 @@
         </p:nvSpPr>
         <p:spPr>
           <a:xfrm>
-            <a:off x="502920" y="2377440"/>
-            <a:ext cx="4846320" cy="475488"/>
+            <a:off x="502920" y="2139696"/>
+            <a:ext cx="4846320" cy="512064"/>
           </a:xfrm>
           <a:prstGeom prst="roundRect">
             <a:avLst>
-              <a:gd name="adj" fmla="val 26923"/>
+              <a:gd name="adj" fmla="val 25000"/>
             </a:avLst>
           </a:prstGeom>
           <a:solidFill>
@@ -8435,7 +8668,7 @@
         </p:nvSpPr>
         <p:spPr>
           <a:xfrm>
-            <a:off x="704088" y="2551176"/>
+            <a:off x="704088" y="2327148"/>
             <a:ext cx="137160" cy="137160"/>
           </a:xfrm>
           <a:prstGeom prst="ellipse">
@@ -8460,8 +8693,8 @@
         </p:nvSpPr>
         <p:spPr>
           <a:xfrm>
-            <a:off x="960120" y="2478024"/>
-            <a:ext cx="2377440" cy="274320"/>
+            <a:off x="960120" y="2139696"/>
+            <a:ext cx="2377440" cy="512064"/>
           </a:xfrm>
           <a:prstGeom prst="rect">
             <a:avLst/>
@@ -8499,8 +8732,8 @@
         </p:nvSpPr>
         <p:spPr>
           <a:xfrm>
-            <a:off x="3337560" y="2478024"/>
-            <a:ext cx="1828800" cy="274320"/>
+            <a:off x="3337560" y="2139696"/>
+            <a:ext cx="1828800" cy="512064"/>
           </a:xfrm>
           <a:prstGeom prst="rect">
             <a:avLst/>
@@ -8538,12 +8771,12 @@
         </p:nvSpPr>
         <p:spPr>
           <a:xfrm>
-            <a:off x="502920" y="2944368"/>
-            <a:ext cx="4846320" cy="475488"/>
+            <a:off x="502920" y="2761488"/>
+            <a:ext cx="4846320" cy="512064"/>
           </a:xfrm>
           <a:prstGeom prst="roundRect">
             <a:avLst>
-              <a:gd name="adj" fmla="val 26923"/>
+              <a:gd name="adj" fmla="val 25000"/>
             </a:avLst>
           </a:prstGeom>
           <a:solidFill>
@@ -8572,7 +8805,7 @@
         </p:nvSpPr>
         <p:spPr>
           <a:xfrm>
-            <a:off x="704088" y="3118104"/>
+            <a:off x="704088" y="2948940"/>
             <a:ext cx="137160" cy="137160"/>
           </a:xfrm>
           <a:prstGeom prst="ellipse">
@@ -8597,8 +8830,8 @@
         </p:nvSpPr>
         <p:spPr>
           <a:xfrm>
-            <a:off x="960120" y="3044952"/>
-            <a:ext cx="2377440" cy="274320"/>
+            <a:off x="960120" y="2761488"/>
+            <a:ext cx="2377440" cy="512064"/>
           </a:xfrm>
           <a:prstGeom prst="rect">
             <a:avLst/>
@@ -8636,8 +8869,8 @@
         </p:nvSpPr>
         <p:spPr>
           <a:xfrm>
-            <a:off x="3337560" y="3044952"/>
-            <a:ext cx="1828800" cy="274320"/>
+            <a:off x="3337560" y="2761488"/>
+            <a:ext cx="1828800" cy="512064"/>
           </a:xfrm>
           <a:prstGeom prst="rect">
             <a:avLst/>
@@ -8675,12 +8908,12 @@
         </p:nvSpPr>
         <p:spPr>
           <a:xfrm>
-            <a:off x="502920" y="3511296"/>
-            <a:ext cx="4846320" cy="475488"/>
+            <a:off x="502920" y="3383280"/>
+            <a:ext cx="4846320" cy="512064"/>
           </a:xfrm>
           <a:prstGeom prst="roundRect">
             <a:avLst>
-              <a:gd name="adj" fmla="val 26923"/>
+              <a:gd name="adj" fmla="val 25000"/>
             </a:avLst>
           </a:prstGeom>
           <a:solidFill>
@@ -8709,7 +8942,7 @@
         </p:nvSpPr>
         <p:spPr>
           <a:xfrm>
-            <a:off x="704088" y="3685032"/>
+            <a:off x="704088" y="3570732"/>
             <a:ext cx="137160" cy="137160"/>
           </a:xfrm>
           <a:prstGeom prst="ellipse">
@@ -8734,8 +8967,8 @@
         </p:nvSpPr>
         <p:spPr>
           <a:xfrm>
-            <a:off x="960120" y="3611880"/>
-            <a:ext cx="2377440" cy="274320"/>
+            <a:off x="960120" y="3383280"/>
+            <a:ext cx="2377440" cy="512064"/>
           </a:xfrm>
           <a:prstGeom prst="rect">
             <a:avLst/>
@@ -8773,8 +9006,8 @@
         </p:nvSpPr>
         <p:spPr>
           <a:xfrm>
-            <a:off x="3337560" y="3611880"/>
-            <a:ext cx="1828800" cy="274320"/>
+            <a:off x="3337560" y="3383280"/>
+            <a:ext cx="1828800" cy="512064"/>
           </a:xfrm>
           <a:prstGeom prst="rect">
             <a:avLst/>
@@ -8812,12 +9045,12 @@
         </p:nvSpPr>
         <p:spPr>
           <a:xfrm>
-            <a:off x="502920" y="4078224"/>
-            <a:ext cx="4846320" cy="475488"/>
+            <a:off x="502920" y="4005072"/>
+            <a:ext cx="4846320" cy="512064"/>
           </a:xfrm>
           <a:prstGeom prst="roundRect">
             <a:avLst>
-              <a:gd name="adj" fmla="val 26923"/>
+              <a:gd name="adj" fmla="val 25000"/>
             </a:avLst>
           </a:prstGeom>
           <a:solidFill>
@@ -8846,7 +9079,7 @@
         </p:nvSpPr>
         <p:spPr>
           <a:xfrm>
-            <a:off x="704088" y="4251960"/>
+            <a:off x="704088" y="4192524"/>
             <a:ext cx="137160" cy="137160"/>
           </a:xfrm>
           <a:prstGeom prst="ellipse">
@@ -8871,8 +9104,8 @@
         </p:nvSpPr>
         <p:spPr>
           <a:xfrm>
-            <a:off x="960120" y="4178808"/>
-            <a:ext cx="2377440" cy="274320"/>
+            <a:off x="960120" y="4005072"/>
+            <a:ext cx="2377440" cy="512064"/>
           </a:xfrm>
           <a:prstGeom prst="rect">
             <a:avLst/>
@@ -8910,8 +9143,8 @@
         </p:nvSpPr>
         <p:spPr>
           <a:xfrm>
-            <a:off x="3337560" y="4178808"/>
-            <a:ext cx="1828800" cy="274320"/>
+            <a:off x="3337560" y="4005072"/>
+            <a:ext cx="1828800" cy="512064"/>
           </a:xfrm>
           <a:prstGeom prst="rect">
             <a:avLst/>
@@ -8949,8 +9182,8 @@
         </p:nvSpPr>
         <p:spPr>
           <a:xfrm>
-            <a:off x="5806440" y="1280160"/>
-            <a:ext cx="2834640" cy="3401568"/>
+            <a:off x="5806440" y="1188720"/>
+            <a:ext cx="2834640" cy="3383280"/>
           </a:xfrm>
           <a:prstGeom prst="roundRect">
             <a:avLst>
@@ -8991,8 +9224,8 @@
         </p:blipFill>
         <p:spPr>
           <a:xfrm>
-            <a:off x="5989320" y="1481328"/>
-            <a:ext cx="2468880" cy="3035808"/>
+            <a:off x="5989320" y="1362456"/>
+            <a:ext cx="2466594" cy="3035808"/>
           </a:xfrm>
           <a:prstGeom prst="rect">
             <a:avLst/>

--- a/Проект_Эхо_презентация.pptx
+++ b/Проект_Эхо_презентация.pptx
@@ -2238,17 +2238,10 @@
           </a:solidFill>
           <a:ln w="12700">
             <a:solidFill>
-              <a:srgbClr val="FFFFFF"/>
+              <a:srgbClr val="E4E9EE"/>
             </a:solidFill>
             <a:prstDash val="solid"/>
           </a:ln>
-          <a:effectLst>
-            <a:outerShdw sx="100000" sy="100000" kx="0" ky="0" algn="bl" rotWithShape="0" blurRad="127000" dist="25400" dir="5400000">
-              <a:srgbClr val="1E3F68">
-                <a:alpha val="10000"/>
-              </a:srgbClr>
-            </a:outerShdw>
-          </a:effectLst>
         </p:spPr>
       </p:sp>
       <p:sp>
@@ -2378,17 +2371,10 @@
           </a:solidFill>
           <a:ln w="12700">
             <a:solidFill>
-              <a:srgbClr val="FFFFFF"/>
+              <a:srgbClr val="E4E9EE"/>
             </a:solidFill>
             <a:prstDash val="solid"/>
           </a:ln>
-          <a:effectLst>
-            <a:outerShdw sx="100000" sy="100000" kx="0" ky="0" algn="bl" rotWithShape="0" blurRad="127000" dist="25400" dir="5400000">
-              <a:srgbClr val="1E3F68">
-                <a:alpha val="10000"/>
-              </a:srgbClr>
-            </a:outerShdw>
-          </a:effectLst>
         </p:spPr>
       </p:sp>
       <p:sp>
@@ -2518,17 +2504,10 @@
           </a:solidFill>
           <a:ln w="12700">
             <a:solidFill>
-              <a:srgbClr val="FFFFFF"/>
+              <a:srgbClr val="E4E9EE"/>
             </a:solidFill>
             <a:prstDash val="solid"/>
           </a:ln>
-          <a:effectLst>
-            <a:outerShdw sx="100000" sy="100000" kx="0" ky="0" algn="bl" rotWithShape="0" blurRad="127000" dist="25400" dir="5400000">
-              <a:srgbClr val="1E3F68">
-                <a:alpha val="10000"/>
-              </a:srgbClr>
-            </a:outerShdw>
-          </a:effectLst>
         </p:spPr>
       </p:sp>
       <p:sp>
@@ -2658,17 +2637,10 @@
           </a:solidFill>
           <a:ln w="12700">
             <a:solidFill>
-              <a:srgbClr val="FFFFFF"/>
+              <a:srgbClr val="E4E9EE"/>
             </a:solidFill>
             <a:prstDash val="solid"/>
           </a:ln>
-          <a:effectLst>
-            <a:outerShdw sx="100000" sy="100000" kx="0" ky="0" algn="bl" rotWithShape="0" blurRad="127000" dist="25400" dir="5400000">
-              <a:srgbClr val="1E3F68">
-                <a:alpha val="10000"/>
-              </a:srgbClr>
-            </a:outerShdw>
-          </a:effectLst>
         </p:spPr>
       </p:sp>
       <p:sp>
@@ -3502,13 +3474,6 @@
             </a:solidFill>
             <a:prstDash val="solid"/>
           </a:ln>
-          <a:effectLst>
-            <a:outerShdw sx="100000" sy="100000" kx="0" ky="0" algn="bl" rotWithShape="0" blurRad="127000" dist="25400" dir="5400000">
-              <a:srgbClr val="1E3F68">
-                <a:alpha val="10000"/>
-              </a:srgbClr>
-            </a:outerShdw>
-          </a:effectLst>
         </p:spPr>
       </p:sp>
       <p:sp>
@@ -3854,17 +3819,10 @@
           </a:solidFill>
           <a:ln w="12700">
             <a:solidFill>
-              <a:srgbClr val="FFFFFF"/>
+              <a:srgbClr val="E4E9EE"/>
             </a:solidFill>
             <a:prstDash val="solid"/>
           </a:ln>
-          <a:effectLst>
-            <a:outerShdw sx="100000" sy="100000" kx="0" ky="0" algn="bl" rotWithShape="0" blurRad="127000" dist="25400" dir="5400000">
-              <a:srgbClr val="1E3F68">
-                <a:alpha val="10000"/>
-              </a:srgbClr>
-            </a:outerShdw>
-          </a:effectLst>
         </p:spPr>
       </p:sp>
       <p:sp>
@@ -3994,17 +3952,10 @@
           </a:solidFill>
           <a:ln w="12700">
             <a:solidFill>
-              <a:srgbClr val="FFFFFF"/>
+              <a:srgbClr val="E4E9EE"/>
             </a:solidFill>
             <a:prstDash val="solid"/>
           </a:ln>
-          <a:effectLst>
-            <a:outerShdw sx="100000" sy="100000" kx="0" ky="0" algn="bl" rotWithShape="0" blurRad="127000" dist="25400" dir="5400000">
-              <a:srgbClr val="1E3F68">
-                <a:alpha val="10000"/>
-              </a:srgbClr>
-            </a:outerShdw>
-          </a:effectLst>
         </p:spPr>
       </p:sp>
       <p:sp>
@@ -4134,17 +4085,10 @@
           </a:solidFill>
           <a:ln w="12700">
             <a:solidFill>
-              <a:srgbClr val="FFFFFF"/>
+              <a:srgbClr val="E4E9EE"/>
             </a:solidFill>
             <a:prstDash val="solid"/>
           </a:ln>
-          <a:effectLst>
-            <a:outerShdw sx="100000" sy="100000" kx="0" ky="0" algn="bl" rotWithShape="0" blurRad="127000" dist="25400" dir="5400000">
-              <a:srgbClr val="1E3F68">
-                <a:alpha val="10000"/>
-              </a:srgbClr>
-            </a:outerShdw>
-          </a:effectLst>
         </p:spPr>
       </p:sp>
       <p:sp>
@@ -4278,13 +4222,6 @@
             </a:solidFill>
             <a:prstDash val="solid"/>
           </a:ln>
-          <a:effectLst>
-            <a:outerShdw sx="100000" sy="100000" kx="0" ky="0" algn="bl" rotWithShape="0" blurRad="127000" dist="25400" dir="5400000">
-              <a:srgbClr val="1E3F68">
-                <a:alpha val="10000"/>
-              </a:srgbClr>
-            </a:outerShdw>
-          </a:effectLst>
         </p:spPr>
       </p:sp>
       <p:sp>
@@ -4460,17 +4397,10 @@
           </a:solidFill>
           <a:ln w="12700">
             <a:solidFill>
-              <a:srgbClr val="FFFFFF"/>
+              <a:srgbClr val="E4E9EE"/>
             </a:solidFill>
             <a:prstDash val="solid"/>
           </a:ln>
-          <a:effectLst>
-            <a:outerShdw sx="100000" sy="100000" kx="0" ky="0" algn="bl" rotWithShape="0" blurRad="127000" dist="25400" dir="5400000">
-              <a:srgbClr val="1E3F68">
-                <a:alpha val="10000"/>
-              </a:srgbClr>
-            </a:outerShdw>
-          </a:effectLst>
         </p:spPr>
       </p:sp>
       <p:sp>
@@ -4773,17 +4703,10 @@
           </a:solidFill>
           <a:ln w="12700">
             <a:solidFill>
-              <a:srgbClr val="FFFFFF"/>
+              <a:srgbClr val="E4E9EE"/>
             </a:solidFill>
             <a:prstDash val="solid"/>
           </a:ln>
-          <a:effectLst>
-            <a:outerShdw sx="100000" sy="100000" kx="0" ky="0" algn="bl" rotWithShape="0" blurRad="127000" dist="25400" dir="5400000">
-              <a:srgbClr val="1E3F68">
-                <a:alpha val="10000"/>
-              </a:srgbClr>
-            </a:outerShdw>
-          </a:effectLst>
         </p:spPr>
       </p:sp>
       <p:sp>
@@ -5259,17 +5182,10 @@
           </a:solidFill>
           <a:ln w="12700">
             <a:solidFill>
-              <a:srgbClr val="FFFFFF"/>
+              <a:srgbClr val="E4E9EE"/>
             </a:solidFill>
             <a:prstDash val="solid"/>
           </a:ln>
-          <a:effectLst>
-            <a:outerShdw sx="100000" sy="100000" kx="0" ky="0" algn="bl" rotWithShape="0" blurRad="127000" dist="25400" dir="5400000">
-              <a:srgbClr val="1E3F68">
-                <a:alpha val="10000"/>
-              </a:srgbClr>
-            </a:outerShdw>
-          </a:effectLst>
         </p:spPr>
       </p:sp>
       <p:sp>
@@ -5396,17 +5312,10 @@
           </a:solidFill>
           <a:ln w="12700">
             <a:solidFill>
-              <a:srgbClr val="FFFFFF"/>
+              <a:srgbClr val="E4E9EE"/>
             </a:solidFill>
             <a:prstDash val="solid"/>
           </a:ln>
-          <a:effectLst>
-            <a:outerShdw sx="100000" sy="100000" kx="0" ky="0" algn="bl" rotWithShape="0" blurRad="127000" dist="25400" dir="5400000">
-              <a:srgbClr val="1E3F68">
-                <a:alpha val="10000"/>
-              </a:srgbClr>
-            </a:outerShdw>
-          </a:effectLst>
         </p:spPr>
       </p:sp>
       <p:sp>
@@ -5533,17 +5442,10 @@
           </a:solidFill>
           <a:ln w="12700">
             <a:solidFill>
-              <a:srgbClr val="FFFFFF"/>
+              <a:srgbClr val="E4E9EE"/>
             </a:solidFill>
             <a:prstDash val="solid"/>
           </a:ln>
-          <a:effectLst>
-            <a:outerShdw sx="100000" sy="100000" kx="0" ky="0" algn="bl" rotWithShape="0" blurRad="127000" dist="25400" dir="5400000">
-              <a:srgbClr val="1E3F68">
-                <a:alpha val="10000"/>
-              </a:srgbClr>
-            </a:outerShdw>
-          </a:effectLst>
         </p:spPr>
       </p:sp>
       <p:sp>
@@ -5670,17 +5572,10 @@
           </a:solidFill>
           <a:ln w="12700">
             <a:solidFill>
-              <a:srgbClr val="FFFFFF"/>
+              <a:srgbClr val="E4E9EE"/>
             </a:solidFill>
             <a:prstDash val="solid"/>
           </a:ln>
-          <a:effectLst>
-            <a:outerShdw sx="100000" sy="100000" kx="0" ky="0" algn="bl" rotWithShape="0" blurRad="127000" dist="25400" dir="5400000">
-              <a:srgbClr val="1E3F68">
-                <a:alpha val="10000"/>
-              </a:srgbClr>
-            </a:outerShdw>
-          </a:effectLst>
         </p:spPr>
       </p:sp>
       <p:sp>
@@ -5807,17 +5702,10 @@
           </a:solidFill>
           <a:ln w="12700">
             <a:solidFill>
-              <a:srgbClr val="FFFFFF"/>
+              <a:srgbClr val="E4E9EE"/>
             </a:solidFill>
             <a:prstDash val="solid"/>
           </a:ln>
-          <a:effectLst>
-            <a:outerShdw sx="100000" sy="100000" kx="0" ky="0" algn="bl" rotWithShape="0" blurRad="127000" dist="25400" dir="5400000">
-              <a:srgbClr val="1E3F68">
-                <a:alpha val="10000"/>
-              </a:srgbClr>
-            </a:outerShdw>
-          </a:effectLst>
         </p:spPr>
       </p:sp>
       <p:sp>
@@ -6120,17 +6008,10 @@
           </a:solidFill>
           <a:ln w="12700">
             <a:solidFill>
-              <a:srgbClr val="FFFFFF"/>
+              <a:srgbClr val="E4E9EE"/>
             </a:solidFill>
             <a:prstDash val="solid"/>
           </a:ln>
-          <a:effectLst>
-            <a:outerShdw sx="100000" sy="100000" kx="0" ky="0" algn="bl" rotWithShape="0" blurRad="127000" dist="25400" dir="5400000">
-              <a:srgbClr val="1E3F68">
-                <a:alpha val="10000"/>
-              </a:srgbClr>
-            </a:outerShdw>
-          </a:effectLst>
         </p:spPr>
       </p:sp>
       <p:sp>
@@ -6235,17 +6116,10 @@
           </a:solidFill>
           <a:ln w="12700">
             <a:solidFill>
-              <a:srgbClr val="FFFFFF"/>
+              <a:srgbClr val="E4E9EE"/>
             </a:solidFill>
             <a:prstDash val="solid"/>
           </a:ln>
-          <a:effectLst>
-            <a:outerShdw sx="100000" sy="100000" kx="0" ky="0" algn="bl" rotWithShape="0" blurRad="127000" dist="25400" dir="5400000">
-              <a:srgbClr val="1E3F68">
-                <a:alpha val="10000"/>
-              </a:srgbClr>
-            </a:outerShdw>
-          </a:effectLst>
         </p:spPr>
       </p:sp>
       <p:sp>
@@ -6350,17 +6224,10 @@
           </a:solidFill>
           <a:ln w="12700">
             <a:solidFill>
-              <a:srgbClr val="FFFFFF"/>
+              <a:srgbClr val="E4E9EE"/>
             </a:solidFill>
             <a:prstDash val="solid"/>
           </a:ln>
-          <a:effectLst>
-            <a:outerShdw sx="100000" sy="100000" kx="0" ky="0" algn="bl" rotWithShape="0" blurRad="127000" dist="25400" dir="5400000">
-              <a:srgbClr val="1E3F68">
-                <a:alpha val="10000"/>
-              </a:srgbClr>
-            </a:outerShdw>
-          </a:effectLst>
         </p:spPr>
       </p:sp>
       <p:sp>
@@ -6599,17 +6466,10 @@
           </a:solidFill>
           <a:ln w="12700">
             <a:solidFill>
-              <a:srgbClr val="FFFFFF"/>
+              <a:srgbClr val="E4E9EE"/>
             </a:solidFill>
             <a:prstDash val="solid"/>
           </a:ln>
-          <a:effectLst>
-            <a:outerShdw sx="100000" sy="100000" kx="0" ky="0" algn="bl" rotWithShape="0" blurRad="127000" dist="25400" dir="5400000">
-              <a:srgbClr val="1E3F68">
-                <a:alpha val="10000"/>
-              </a:srgbClr>
-            </a:outerShdw>
-          </a:effectLst>
         </p:spPr>
       </p:sp>
       <p:sp>
@@ -6714,17 +6574,10 @@
           </a:solidFill>
           <a:ln w="12700">
             <a:solidFill>
-              <a:srgbClr val="FFFFFF"/>
+              <a:srgbClr val="E4E9EE"/>
             </a:solidFill>
             <a:prstDash val="solid"/>
           </a:ln>
-          <a:effectLst>
-            <a:outerShdw sx="100000" sy="100000" kx="0" ky="0" algn="bl" rotWithShape="0" blurRad="127000" dist="25400" dir="5400000">
-              <a:srgbClr val="1E3F68">
-                <a:alpha val="10000"/>
-              </a:srgbClr>
-            </a:outerShdw>
-          </a:effectLst>
         </p:spPr>
       </p:sp>
       <p:sp>
@@ -6833,13 +6686,6 @@
             </a:solidFill>
             <a:prstDash val="solid"/>
           </a:ln>
-          <a:effectLst>
-            <a:outerShdw sx="100000" sy="100000" kx="0" ky="0" algn="bl" rotWithShape="0" blurRad="127000" dist="25400" dir="5400000">
-              <a:srgbClr val="1E3F68">
-                <a:alpha val="10000"/>
-              </a:srgbClr>
-            </a:outerShdw>
-          </a:effectLst>
         </p:spPr>
       </p:sp>
       <p:sp>
@@ -7081,17 +6927,10 @@
           </a:solidFill>
           <a:ln w="12700">
             <a:solidFill>
-              <a:srgbClr val="FFFFFF"/>
+              <a:srgbClr val="E4E9EE"/>
             </a:solidFill>
             <a:prstDash val="solid"/>
           </a:ln>
-          <a:effectLst>
-            <a:outerShdw sx="100000" sy="100000" kx="0" ky="0" algn="bl" rotWithShape="0" blurRad="127000" dist="25400" dir="5400000">
-              <a:srgbClr val="1E3F68">
-                <a:alpha val="10000"/>
-              </a:srgbClr>
-            </a:outerShdw>
-          </a:effectLst>
         </p:spPr>
       </p:sp>
       <p:sp>
@@ -7179,17 +7018,10 @@
           </a:solidFill>
           <a:ln w="12700">
             <a:solidFill>
-              <a:srgbClr val="FFFFFF"/>
+              <a:srgbClr val="E4E9EE"/>
             </a:solidFill>
             <a:prstDash val="solid"/>
           </a:ln>
-          <a:effectLst>
-            <a:outerShdw sx="100000" sy="100000" kx="0" ky="0" algn="bl" rotWithShape="0" blurRad="127000" dist="25400" dir="5400000">
-              <a:srgbClr val="1E3F68">
-                <a:alpha val="10000"/>
-              </a:srgbClr>
-            </a:outerShdw>
-          </a:effectLst>
         </p:spPr>
       </p:sp>
       <p:sp>
@@ -7277,17 +7109,10 @@
           </a:solidFill>
           <a:ln w="12700">
             <a:solidFill>
-              <a:srgbClr val="FFFFFF"/>
+              <a:srgbClr val="E4E9EE"/>
             </a:solidFill>
             <a:prstDash val="solid"/>
           </a:ln>
-          <a:effectLst>
-            <a:outerShdw sx="100000" sy="100000" kx="0" ky="0" algn="bl" rotWithShape="0" blurRad="127000" dist="25400" dir="5400000">
-              <a:srgbClr val="1E3F68">
-                <a:alpha val="10000"/>
-              </a:srgbClr>
-            </a:outerShdw>
-          </a:effectLst>
         </p:spPr>
       </p:sp>
       <p:sp>
@@ -7375,17 +7200,10 @@
           </a:solidFill>
           <a:ln w="12700">
             <a:solidFill>
-              <a:srgbClr val="FFFFFF"/>
+              <a:srgbClr val="E4E9EE"/>
             </a:solidFill>
             <a:prstDash val="solid"/>
           </a:ln>
-          <a:effectLst>
-            <a:outerShdw sx="100000" sy="100000" kx="0" ky="0" algn="bl" rotWithShape="0" blurRad="127000" dist="25400" dir="5400000">
-              <a:srgbClr val="1E3F68">
-                <a:alpha val="10000"/>
-              </a:srgbClr>
-            </a:outerShdw>
-          </a:effectLst>
         </p:spPr>
       </p:sp>
       <p:sp>
@@ -7473,17 +7291,10 @@
           </a:solidFill>
           <a:ln w="12700">
             <a:solidFill>
-              <a:srgbClr val="FFFFFF"/>
+              <a:srgbClr val="E4E9EE"/>
             </a:solidFill>
             <a:prstDash val="solid"/>
           </a:ln>
-          <a:effectLst>
-            <a:outerShdw sx="100000" sy="100000" kx="0" ky="0" algn="bl" rotWithShape="0" blurRad="127000" dist="25400" dir="5400000">
-              <a:srgbClr val="1E3F68">
-                <a:alpha val="10000"/>
-              </a:srgbClr>
-            </a:outerShdw>
-          </a:effectLst>
         </p:spPr>
       </p:sp>
       <p:sp>
@@ -7571,17 +7382,10 @@
           </a:solidFill>
           <a:ln w="12700">
             <a:solidFill>
-              <a:srgbClr val="FFFFFF"/>
+              <a:srgbClr val="E4E9EE"/>
             </a:solidFill>
             <a:prstDash val="solid"/>
           </a:ln>
-          <a:effectLst>
-            <a:outerShdw sx="100000" sy="100000" kx="0" ky="0" algn="bl" rotWithShape="0" blurRad="127000" dist="25400" dir="5400000">
-              <a:srgbClr val="1E3F68">
-                <a:alpha val="10000"/>
-              </a:srgbClr>
-            </a:outerShdw>
-          </a:effectLst>
         </p:spPr>
       </p:sp>
       <p:sp>
@@ -7669,17 +7473,10 @@
           </a:solidFill>
           <a:ln w="12700">
             <a:solidFill>
-              <a:srgbClr val="FFFFFF"/>
+              <a:srgbClr val="E4E9EE"/>
             </a:solidFill>
             <a:prstDash val="solid"/>
           </a:ln>
-          <a:effectLst>
-            <a:outerShdw sx="100000" sy="100000" kx="0" ky="0" algn="bl" rotWithShape="0" blurRad="127000" dist="25400" dir="5400000">
-              <a:srgbClr val="1E3F68">
-                <a:alpha val="10000"/>
-              </a:srgbClr>
-            </a:outerShdw>
-          </a:effectLst>
         </p:spPr>
       </p:sp>
       <p:sp>
@@ -7767,17 +7564,10 @@
           </a:solidFill>
           <a:ln w="12700">
             <a:solidFill>
-              <a:srgbClr val="FFFFFF"/>
+              <a:srgbClr val="E4E9EE"/>
             </a:solidFill>
             <a:prstDash val="solid"/>
           </a:ln>
-          <a:effectLst>
-            <a:outerShdw sx="100000" sy="100000" kx="0" ky="0" algn="bl" rotWithShape="0" blurRad="127000" dist="25400" dir="5400000">
-              <a:srgbClr val="1E3F68">
-                <a:alpha val="10000"/>
-              </a:srgbClr>
-            </a:outerShdw>
-          </a:effectLst>
         </p:spPr>
       </p:sp>
       <p:sp>
@@ -7869,13 +7659,6 @@
             </a:solidFill>
             <a:prstDash val="solid"/>
           </a:ln>
-          <a:effectLst>
-            <a:outerShdw sx="100000" sy="100000" kx="0" ky="0" algn="bl" rotWithShape="0" blurRad="127000" dist="25400" dir="5400000">
-              <a:srgbClr val="1E3F68">
-                <a:alpha val="10000"/>
-              </a:srgbClr>
-            </a:outerShdw>
-          </a:effectLst>
         </p:spPr>
       </p:sp>
       <p:sp>
@@ -8075,17 +7858,10 @@
           </a:solidFill>
           <a:ln w="12700">
             <a:solidFill>
-              <a:srgbClr val="FFFFFF"/>
+              <a:srgbClr val="E4E9EE"/>
             </a:solidFill>
             <a:prstDash val="solid"/>
           </a:ln>
-          <a:effectLst>
-            <a:outerShdw sx="100000" sy="100000" kx="0" ky="0" algn="bl" rotWithShape="0" blurRad="127000" dist="25400" dir="5400000">
-              <a:srgbClr val="1E3F68">
-                <a:alpha val="10000"/>
-              </a:srgbClr>
-            </a:outerShdw>
-          </a:effectLst>
         </p:spPr>
       </p:sp>
       <p:sp>
@@ -8215,17 +7991,10 @@
           </a:solidFill>
           <a:ln w="12700">
             <a:solidFill>
-              <a:srgbClr val="FFFFFF"/>
+              <a:srgbClr val="E4E9EE"/>
             </a:solidFill>
             <a:prstDash val="solid"/>
           </a:ln>
-          <a:effectLst>
-            <a:outerShdw sx="100000" sy="100000" kx="0" ky="0" algn="bl" rotWithShape="0" blurRad="127000" dist="25400" dir="5400000">
-              <a:srgbClr val="1E3F68">
-                <a:alpha val="10000"/>
-              </a:srgbClr>
-            </a:outerShdw>
-          </a:effectLst>
         </p:spPr>
       </p:sp>
       <p:sp>
@@ -8355,17 +8124,10 @@
           </a:solidFill>
           <a:ln w="12700">
             <a:solidFill>
-              <a:srgbClr val="FFFFFF"/>
+              <a:srgbClr val="E4E9EE"/>
             </a:solidFill>
             <a:prstDash val="solid"/>
           </a:ln>
-          <a:effectLst>
-            <a:outerShdw sx="100000" sy="100000" kx="0" ky="0" algn="bl" rotWithShape="0" blurRad="127000" dist="25400" dir="5400000">
-              <a:srgbClr val="1E3F68">
-                <a:alpha val="10000"/>
-              </a:srgbClr>
-            </a:outerShdw>
-          </a:effectLst>
         </p:spPr>
       </p:sp>
       <p:sp>
@@ -8647,17 +8409,10 @@
           </a:solidFill>
           <a:ln w="12700">
             <a:solidFill>
-              <a:srgbClr val="FFFFFF"/>
+              <a:srgbClr val="E4E9EE"/>
             </a:solidFill>
             <a:prstDash val="solid"/>
           </a:ln>
-          <a:effectLst>
-            <a:outerShdw sx="100000" sy="100000" kx="0" ky="0" algn="bl" rotWithShape="0" blurRad="127000" dist="25400" dir="5400000">
-              <a:srgbClr val="1E3F68">
-                <a:alpha val="10000"/>
-              </a:srgbClr>
-            </a:outerShdw>
-          </a:effectLst>
         </p:spPr>
       </p:sp>
       <p:sp>
@@ -8784,17 +8539,10 @@
           </a:solidFill>
           <a:ln w="12700">
             <a:solidFill>
-              <a:srgbClr val="FFFFFF"/>
+              <a:srgbClr val="E4E9EE"/>
             </a:solidFill>
             <a:prstDash val="solid"/>
           </a:ln>
-          <a:effectLst>
-            <a:outerShdw sx="100000" sy="100000" kx="0" ky="0" algn="bl" rotWithShape="0" blurRad="127000" dist="25400" dir="5400000">
-              <a:srgbClr val="1E3F68">
-                <a:alpha val="10000"/>
-              </a:srgbClr>
-            </a:outerShdw>
-          </a:effectLst>
         </p:spPr>
       </p:sp>
       <p:sp>
@@ -8921,17 +8669,10 @@
           </a:solidFill>
           <a:ln w="12700">
             <a:solidFill>
-              <a:srgbClr val="FFFFFF"/>
+              <a:srgbClr val="E4E9EE"/>
             </a:solidFill>
             <a:prstDash val="solid"/>
           </a:ln>
-          <a:effectLst>
-            <a:outerShdw sx="100000" sy="100000" kx="0" ky="0" algn="bl" rotWithShape="0" blurRad="127000" dist="25400" dir="5400000">
-              <a:srgbClr val="1E3F68">
-                <a:alpha val="10000"/>
-              </a:srgbClr>
-            </a:outerShdw>
-          </a:effectLst>
         </p:spPr>
       </p:sp>
       <p:sp>
@@ -9058,17 +8799,10 @@
           </a:solidFill>
           <a:ln w="12700">
             <a:solidFill>
-              <a:srgbClr val="FFFFFF"/>
+              <a:srgbClr val="E4E9EE"/>
             </a:solidFill>
             <a:prstDash val="solid"/>
           </a:ln>
-          <a:effectLst>
-            <a:outerShdw sx="100000" sy="100000" kx="0" ky="0" algn="bl" rotWithShape="0" blurRad="127000" dist="25400" dir="5400000">
-              <a:srgbClr val="1E3F68">
-                <a:alpha val="10000"/>
-              </a:srgbClr>
-            </a:outerShdw>
-          </a:effectLst>
         </p:spPr>
       </p:sp>
       <p:sp>
@@ -9195,17 +8929,10 @@
           </a:solidFill>
           <a:ln w="12700">
             <a:solidFill>
-              <a:srgbClr val="FFFFFF"/>
+              <a:srgbClr val="E4E9EE"/>
             </a:solidFill>
             <a:prstDash val="solid"/>
           </a:ln>
-          <a:effectLst>
-            <a:outerShdw sx="100000" sy="100000" kx="0" ky="0" algn="bl" rotWithShape="0" blurRad="127000" dist="25400" dir="5400000">
-              <a:srgbClr val="1E3F68">
-                <a:alpha val="10000"/>
-              </a:srgbClr>
-            </a:outerShdw>
-          </a:effectLst>
         </p:spPr>
       </p:sp>
       <p:pic>
